--- a/output/pptx/ocean-layout-reference.pptx
+++ b/output/pptx/ocean-layout-reference.pptx
@@ -2243,13 +2243,14 @@
         </p:nvPicPr>
         <p:blipFill>
           <a:blip r:embed="rId1"/>
-          <a:srcRect l="0" r="0" t="0" b="0"/>
-          <a:stretch/>
+          <a:stretch>
+            <a:fillRect/>
+          </a:stretch>
         </p:blipFill>
         <p:spPr>
           <a:xfrm>
-            <a:off x="548640" y="475488"/>
-            <a:ext cx="1371600" cy="292608"/>
+            <a:off x="548640" y="457200"/>
+            <a:ext cx="1143000" cy="319126"/>
           </a:xfrm>
           <a:prstGeom prst="rect">
             <a:avLst/>
@@ -2574,13 +2575,14 @@
         </p:nvPicPr>
         <p:blipFill>
           <a:blip r:embed="rId1"/>
-          <a:srcRect l="0" r="0" t="0" b="0"/>
-          <a:stretch/>
+          <a:stretch>
+            <a:fillRect/>
+          </a:stretch>
         </p:blipFill>
         <p:spPr>
           <a:xfrm>
-            <a:off x="548640" y="475488"/>
-            <a:ext cx="1371600" cy="292608"/>
+            <a:off x="548640" y="457200"/>
+            <a:ext cx="1143000" cy="319126"/>
           </a:xfrm>
           <a:prstGeom prst="rect">
             <a:avLst/>
@@ -3290,13 +3292,14 @@
         </p:nvPicPr>
         <p:blipFill>
           <a:blip r:embed="rId1"/>
-          <a:srcRect l="0" r="0" t="0" b="0"/>
-          <a:stretch/>
+          <a:stretch>
+            <a:fillRect/>
+          </a:stretch>
         </p:blipFill>
         <p:spPr>
           <a:xfrm>
-            <a:off x="548640" y="475488"/>
-            <a:ext cx="1371600" cy="292608"/>
+            <a:off x="548640" y="457200"/>
+            <a:ext cx="1143000" cy="319126"/>
           </a:xfrm>
           <a:prstGeom prst="rect">
             <a:avLst/>
@@ -4083,13 +4086,14 @@
         </p:nvPicPr>
         <p:blipFill>
           <a:blip r:embed="rId1"/>
-          <a:srcRect l="0" r="0" t="0" b="0"/>
-          <a:stretch/>
+          <a:stretch>
+            <a:fillRect/>
+          </a:stretch>
         </p:blipFill>
         <p:spPr>
           <a:xfrm>
-            <a:off x="548640" y="475488"/>
-            <a:ext cx="1371600" cy="292608"/>
+            <a:off x="548640" y="457200"/>
+            <a:ext cx="1143000" cy="319126"/>
           </a:xfrm>
           <a:prstGeom prst="rect">
             <a:avLst/>
@@ -4730,13 +4734,14 @@
         </p:nvPicPr>
         <p:blipFill>
           <a:blip r:embed="rId1"/>
-          <a:srcRect l="0" r="0" t="0" b="0"/>
-          <a:stretch/>
+          <a:stretch>
+            <a:fillRect/>
+          </a:stretch>
         </p:blipFill>
         <p:spPr>
           <a:xfrm>
-            <a:off x="548640" y="475488"/>
-            <a:ext cx="1371600" cy="292608"/>
+            <a:off x="548640" y="457200"/>
+            <a:ext cx="1143000" cy="319126"/>
           </a:xfrm>
           <a:prstGeom prst="rect">
             <a:avLst/>
@@ -6037,13 +6042,14 @@
         </p:nvPicPr>
         <p:blipFill>
           <a:blip r:embed="rId1"/>
-          <a:srcRect l="0" r="0" t="0" b="0"/>
-          <a:stretch/>
+          <a:stretch>
+            <a:fillRect/>
+          </a:stretch>
         </p:blipFill>
         <p:spPr>
           <a:xfrm>
-            <a:off x="548640" y="475488"/>
-            <a:ext cx="1371600" cy="292608"/>
+            <a:off x="548640" y="457200"/>
+            <a:ext cx="1143000" cy="319126"/>
           </a:xfrm>
           <a:prstGeom prst="rect">
             <a:avLst/>
@@ -6325,13 +6331,14 @@
         </p:nvPicPr>
         <p:blipFill>
           <a:blip r:embed="rId1"/>
-          <a:srcRect l="0" r="0" t="0" b="0"/>
-          <a:stretch/>
+          <a:stretch>
+            <a:fillRect/>
+          </a:stretch>
         </p:blipFill>
         <p:spPr>
           <a:xfrm>
-            <a:off x="548640" y="475488"/>
-            <a:ext cx="1371600" cy="292608"/>
+            <a:off x="548640" y="457200"/>
+            <a:ext cx="1143000" cy="319126"/>
           </a:xfrm>
           <a:prstGeom prst="rect">
             <a:avLst/>
@@ -6656,13 +6663,14 @@
         </p:nvPicPr>
         <p:blipFill>
           <a:blip r:embed="rId1"/>
-          <a:srcRect l="0" r="0" t="0" b="0"/>
-          <a:stretch/>
+          <a:stretch>
+            <a:fillRect/>
+          </a:stretch>
         </p:blipFill>
         <p:spPr>
           <a:xfrm>
-            <a:off x="548640" y="475488"/>
-            <a:ext cx="1371600" cy="292608"/>
+            <a:off x="548640" y="457200"/>
+            <a:ext cx="1143000" cy="319126"/>
           </a:xfrm>
           <a:prstGeom prst="rect">
             <a:avLst/>
@@ -7284,13 +7292,14 @@
         </p:nvPicPr>
         <p:blipFill>
           <a:blip r:embed="rId1"/>
-          <a:srcRect l="0" r="0" t="0" b="0"/>
-          <a:stretch/>
+          <a:stretch>
+            <a:fillRect/>
+          </a:stretch>
         </p:blipFill>
         <p:spPr>
           <a:xfrm>
-            <a:off x="548640" y="475488"/>
-            <a:ext cx="1371600" cy="292608"/>
+            <a:off x="548640" y="457200"/>
+            <a:ext cx="1143000" cy="319126"/>
           </a:xfrm>
           <a:prstGeom prst="rect">
             <a:avLst/>
@@ -8097,13 +8106,14 @@
         </p:nvPicPr>
         <p:blipFill>
           <a:blip r:embed="rId1"/>
-          <a:srcRect l="0" r="0" t="0" b="0"/>
-          <a:stretch/>
+          <a:stretch>
+            <a:fillRect/>
+          </a:stretch>
         </p:blipFill>
         <p:spPr>
           <a:xfrm>
-            <a:off x="548640" y="475488"/>
-            <a:ext cx="1371600" cy="292608"/>
+            <a:off x="548640" y="457200"/>
+            <a:ext cx="1143000" cy="319126"/>
           </a:xfrm>
           <a:prstGeom prst="rect">
             <a:avLst/>
@@ -8981,13 +8991,14 @@
         </p:nvPicPr>
         <p:blipFill>
           <a:blip r:embed="rId1"/>
-          <a:srcRect l="0" r="0" t="0" b="0"/>
-          <a:stretch/>
+          <a:stretch>
+            <a:fillRect/>
+          </a:stretch>
         </p:blipFill>
         <p:spPr>
           <a:xfrm>
-            <a:off x="548640" y="475488"/>
-            <a:ext cx="1371600" cy="292608"/>
+            <a:off x="548640" y="457200"/>
+            <a:ext cx="1143000" cy="319126"/>
           </a:xfrm>
           <a:prstGeom prst="rect">
             <a:avLst/>
@@ -9874,13 +9885,14 @@
         </p:nvPicPr>
         <p:blipFill>
           <a:blip r:embed="rId1"/>
-          <a:srcRect l="0" r="0" t="0" b="0"/>
-          <a:stretch/>
+          <a:stretch>
+            <a:fillRect/>
+          </a:stretch>
         </p:blipFill>
         <p:spPr>
           <a:xfrm>
-            <a:off x="548640" y="475488"/>
-            <a:ext cx="1371600" cy="292608"/>
+            <a:off x="548640" y="457200"/>
+            <a:ext cx="1143000" cy="319126"/>
           </a:xfrm>
           <a:prstGeom prst="rect">
             <a:avLst/>
@@ -11387,13 +11399,14 @@
         </p:nvPicPr>
         <p:blipFill>
           <a:blip r:embed="rId1"/>
-          <a:srcRect l="0" r="0" t="0" b="0"/>
-          <a:stretch/>
+          <a:stretch>
+            <a:fillRect/>
+          </a:stretch>
         </p:blipFill>
         <p:spPr>
           <a:xfrm>
-            <a:off x="548640" y="475488"/>
-            <a:ext cx="1371600" cy="292608"/>
+            <a:off x="548640" y="457200"/>
+            <a:ext cx="1143000" cy="319126"/>
           </a:xfrm>
           <a:prstGeom prst="rect">
             <a:avLst/>

--- a/output/pptx/ocean-layout-reference.pptx
+++ b/output/pptx/ocean-layout-reference.pptx
@@ -1883,7 +1883,7 @@
           <a:p>
             <a:r>
               <a:rPr lang="en-US" dirty="0"/>
-              <a:t/>
+              <a:t>Solar, storage and interconnection sized to the load.</a:t>
             </a:r>
             <a:endParaRPr lang="en-US" dirty="0"/>
           </a:p>
@@ -2822,22 +2822,22 @@
         </p:nvSpPr>
         <p:spPr>
           <a:xfrm>
-            <a:off x="711200" y="5715000"/>
-            <a:ext cx="10769295" cy="201168"/>
-          </a:xfrm>
-          <a:prstGeom prst="rect">
-            <a:avLst/>
-          </a:prstGeom>
-          <a:noFill/>
-          <a:ln/>
-        </p:spPr>
-        <p:txBody>
-          <a:bodyPr wrap="square" lIns="0" tIns="0" rIns="0" bIns="0" rtlCol="0" anchor="t"/>
-          <a:lstStyle/>
-          <a:p>
-            <a:pPr algn="l" indent="0" marL="0">
-              <a:lnSpc>
-                <a:spcPts val="1116"/>
+            <a:off x="711200" y="5537200"/>
+            <a:ext cx="10769295" cy="402336"/>
+          </a:xfrm>
+          <a:prstGeom prst="rect">
+            <a:avLst/>
+          </a:prstGeom>
+          <a:noFill/>
+          <a:ln/>
+        </p:spPr>
+        <p:txBody>
+          <a:bodyPr wrap="square" lIns="0" tIns="0" rIns="0" bIns="0" rtlCol="0" anchor="t"/>
+          <a:lstStyle/>
+          <a:p>
+            <a:pPr algn="l" indent="0" marL="0">
+              <a:lnSpc>
+                <a:spcPts val="1300"/>
               </a:lnSpc>
               <a:buNone/>
             </a:pPr>
@@ -2850,7 +2850,27 @@
                 <a:ea typeface="Stack Sans Headline Light" pitchFamily="34" charset="-122"/>
                 <a:cs typeface="Stack Sans Headline Light" pitchFamily="34" charset="-120"/>
               </a:rPr>
-              <a:t>Design specimen with illustrative figures and representative images. Do not use for any commercial purpose.</a:t>
+              <a:t>Confidential. Prepared for Ocean RCS. Do not copy, forward or distribute without the written consent of Ocean RCS. Design specimen with illustrative figures and representative images. Do not use for any</a:t>
+            </a:r>
+            <a:endParaRPr lang="en-US" sz="900" dirty="0"/>
+          </a:p>
+          <a:p>
+            <a:pPr algn="l" indent="0" marL="0">
+              <a:lnSpc>
+                <a:spcPts val="1300"/>
+              </a:lnSpc>
+              <a:buNone/>
+            </a:pPr>
+            <a:r>
+              <a:rPr lang="en-US" sz="900" dirty="0">
+                <a:solidFill>
+                  <a:srgbClr val="F3FBF8"/>
+                </a:solidFill>
+                <a:latin typeface="Stack Sans Headline Light" pitchFamily="34" charset="0"/>
+                <a:ea typeface="Stack Sans Headline Light" pitchFamily="34" charset="-122"/>
+                <a:cs typeface="Stack Sans Headline Light" pitchFamily="34" charset="-120"/>
+              </a:rPr>
+              <a:t>commercial purpose.</a:t>
             </a:r>
             <a:endParaRPr lang="en-US" sz="900" dirty="0"/>
           </a:p>
@@ -3262,26 +3282,26 @@
         <p:spPr>
           <a:xfrm>
             <a:off x="548640" y="3566160"/>
-            <a:ext cx="11094415" cy="1280160"/>
-          </a:xfrm>
-          <a:prstGeom prst="rect">
-            <a:avLst/>
-          </a:prstGeom>
-          <a:noFill/>
-          <a:ln/>
-        </p:spPr>
-        <p:txBody>
-          <a:bodyPr wrap="square" lIns="0" tIns="0" rIns="0" bIns="0" rtlCol="0" anchor="t"/>
-          <a:lstStyle/>
-          <a:p>
-            <a:pPr algn="l" indent="0" marL="0">
-              <a:lnSpc>
-                <a:spcPts val="4400"/>
-              </a:lnSpc>
-              <a:buNone/>
-            </a:pPr>
-            <a:r>
-              <a:rPr lang="en-US" sz="4000" spc="-80" kern="0" dirty="0">
+            <a:ext cx="11094415" cy="1371600"/>
+          </a:xfrm>
+          <a:prstGeom prst="rect">
+            <a:avLst/>
+          </a:prstGeom>
+          <a:noFill/>
+          <a:ln/>
+        </p:spPr>
+        <p:txBody>
+          <a:bodyPr wrap="square" lIns="0" tIns="0" rIns="0" bIns="0" rtlCol="0" anchor="t"/>
+          <a:lstStyle/>
+          <a:p>
+            <a:pPr algn="l" indent="0" marL="0">
+              <a:lnSpc>
+                <a:spcPts val="4800"/>
+              </a:lnSpc>
+              <a:buNone/>
+            </a:pPr>
+            <a:r>
+              <a:rPr lang="en-US" sz="4400" spc="-88" kern="0" dirty="0">
                 <a:solidFill>
                   <a:srgbClr val="F3FBF8"/>
                 </a:solidFill>
@@ -3291,7 +3311,7 @@
               </a:rPr>
               <a:t>The numbers that decide it</a:t>
             </a:r>
-            <a:endParaRPr lang="en-US" sz="4000" dirty="0"/>
+            <a:endParaRPr lang="en-US" sz="4400" dirty="0"/>
           </a:p>
         </p:txBody>
       </p:sp>
@@ -3303,7 +3323,7 @@
         </p:nvSpPr>
         <p:spPr>
           <a:xfrm>
-            <a:off x="548640" y="4983480"/>
+            <a:off x="548640" y="5074920"/>
             <a:ext cx="11094415" cy="822960"/>
           </a:xfrm>
           <a:prstGeom prst="rect">
@@ -4319,51 +4339,9 @@
           </a:ln>
         </p:spPr>
       </p:sp>
-      <p:sp>
-        <p:nvSpPr>
-          <p:cNvPr id="29" name="ocean:footer"/>
-          <p:cNvSpPr/>
-          <p:nvPr/>
-        </p:nvSpPr>
-        <p:spPr>
-          <a:xfrm>
-            <a:off x="548640" y="6419088"/>
-            <a:ext cx="7315200" cy="182880"/>
-          </a:xfrm>
-          <a:prstGeom prst="rect">
-            <a:avLst/>
-          </a:prstGeom>
-          <a:noFill/>
-          <a:ln/>
-        </p:spPr>
-        <p:txBody>
-          <a:bodyPr wrap="square" lIns="0" tIns="0" rIns="0" bIns="0" rtlCol="0" anchor="t"/>
-          <a:lstStyle/>
-          <a:p>
-            <a:pPr algn="l" indent="0" marL="0">
-              <a:lnSpc>
-                <a:spcPts val="1116"/>
-              </a:lnSpc>
-              <a:buNone/>
-            </a:pPr>
-            <a:r>
-              <a:rPr lang="en-US" sz="900" spc="225" kern="0" dirty="0">
-                <a:solidFill>
-                  <a:srgbClr val="6E734C"/>
-                </a:solidFill>
-                <a:latin typeface="Stack Sans Headline Light" pitchFamily="34" charset="0"/>
-                <a:ea typeface="Stack Sans Headline Light" pitchFamily="34" charset="-122"/>
-                <a:cs typeface="Stack Sans Headline Light" pitchFamily="34" charset="-120"/>
-              </a:rPr>
-              <a:t>OCEAN RCS · DESIGN SPECIMEN · DO NOT USE</a:t>
-            </a:r>
-            <a:endParaRPr lang="en-US" sz="900" dirty="0"/>
-          </a:p>
-        </p:txBody>
-      </p:sp>
       <p:graphicFrame>
         <p:nvGraphicFramePr>
-          <p:cNvPr id="30" name="Chart 0" descr=""/>
+          <p:cNvPr id="29" name="Chart 0" descr=""/>
           <p:cNvGraphicFramePr/>
           <p:nvPr/>
         </p:nvGraphicFramePr>
@@ -4379,7 +4357,7 @@
       </p:graphicFrame>
       <p:sp>
         <p:nvSpPr>
-          <p:cNvPr id="31" name="Shape 27"/>
+          <p:cNvPr id="30" name="Shape 26"/>
           <p:cNvSpPr/>
           <p:nvPr/>
         </p:nvSpPr>
@@ -4402,7 +4380,7 @@
       </p:sp>
       <p:sp>
         <p:nvSpPr>
-          <p:cNvPr id="32" name="ocean:takeaway"/>
+          <p:cNvPr id="31" name="ocean:takeaway"/>
           <p:cNvSpPr/>
           <p:nvPr/>
         </p:nvSpPr>
@@ -4464,7 +4442,7 @@
       </p:sp>
       <p:sp>
         <p:nvSpPr>
-          <p:cNvPr id="33" name="ocean:bottom-line"/>
+          <p:cNvPr id="32" name="ocean:bottom-line"/>
           <p:cNvSpPr/>
           <p:nvPr/>
         </p:nvSpPr>
@@ -4528,7 +4506,7 @@
       </p:sp>
       <p:sp>
         <p:nvSpPr>
-          <p:cNvPr id="34" name="Shape 30"/>
+          <p:cNvPr id="33" name="Shape 29"/>
           <p:cNvSpPr/>
           <p:nvPr/>
         </p:nvSpPr>
@@ -4553,7 +4531,7 @@
       </p:sp>
       <p:sp>
         <p:nvSpPr>
-          <p:cNvPr id="35" name="ocean:label"/>
+          <p:cNvPr id="34" name="ocean:label"/>
           <p:cNvSpPr/>
           <p:nvPr/>
         </p:nvSpPr>
@@ -4595,7 +4573,7 @@
       </p:sp>
       <p:sp>
         <p:nvSpPr>
-          <p:cNvPr id="36" name="ocean:bottom-line"/>
+          <p:cNvPr id="35" name="ocean:bottom-line"/>
           <p:cNvSpPr/>
           <p:nvPr/>
         </p:nvSpPr>
@@ -4632,6 +4610,48 @@
               <a:t>10-year savings of $819K. Payback in 6.4 years.</a:t>
             </a:r>
             <a:endParaRPr lang="en-US" sz="1500" dirty="0"/>
+          </a:p>
+        </p:txBody>
+      </p:sp>
+      <p:sp>
+        <p:nvSpPr>
+          <p:cNvPr id="36" name="ocean:footer"/>
+          <p:cNvSpPr/>
+          <p:nvPr/>
+        </p:nvSpPr>
+        <p:spPr>
+          <a:xfrm>
+            <a:off x="548640" y="6419088"/>
+            <a:ext cx="7315200" cy="182880"/>
+          </a:xfrm>
+          <a:prstGeom prst="rect">
+            <a:avLst/>
+          </a:prstGeom>
+          <a:noFill/>
+          <a:ln/>
+        </p:spPr>
+        <p:txBody>
+          <a:bodyPr wrap="square" lIns="0" tIns="0" rIns="0" bIns="0" rtlCol="0" anchor="t"/>
+          <a:lstStyle/>
+          <a:p>
+            <a:pPr algn="l" indent="0" marL="0">
+              <a:lnSpc>
+                <a:spcPts val="1116"/>
+              </a:lnSpc>
+              <a:buNone/>
+            </a:pPr>
+            <a:r>
+              <a:rPr lang="en-US" sz="900" spc="225" kern="0" dirty="0">
+                <a:solidFill>
+                  <a:srgbClr val="6E734C"/>
+                </a:solidFill>
+                <a:latin typeface="Stack Sans Headline Light" pitchFamily="34" charset="0"/>
+                <a:ea typeface="Stack Sans Headline Light" pitchFamily="34" charset="-122"/>
+                <a:cs typeface="Stack Sans Headline Light" pitchFamily="34" charset="-120"/>
+              </a:rPr>
+              <a:t>OCEAN RCS · CONFIDENTIAL · DESIGN SPECIMEN · DO NOT USE</a:t>
+            </a:r>
+            <a:endParaRPr lang="en-US" sz="900" dirty="0"/>
           </a:p>
         </p:txBody>
       </p:sp>
@@ -5554,48 +5574,6 @@
             <a:prstDash val="solid"/>
           </a:ln>
         </p:spPr>
-      </p:sp>
-      <p:sp>
-        <p:nvSpPr>
-          <p:cNvPr id="28" name="ocean:footer"/>
-          <p:cNvSpPr/>
-          <p:nvPr/>
-        </p:nvSpPr>
-        <p:spPr>
-          <a:xfrm>
-            <a:off x="548640" y="6419088"/>
-            <a:ext cx="7315200" cy="182880"/>
-          </a:xfrm>
-          <a:prstGeom prst="rect">
-            <a:avLst/>
-          </a:prstGeom>
-          <a:noFill/>
-          <a:ln/>
-        </p:spPr>
-        <p:txBody>
-          <a:bodyPr wrap="square" lIns="0" tIns="0" rIns="0" bIns="0" rtlCol="0" anchor="t"/>
-          <a:lstStyle/>
-          <a:p>
-            <a:pPr algn="l" indent="0" marL="0">
-              <a:lnSpc>
-                <a:spcPts val="1116"/>
-              </a:lnSpc>
-              <a:buNone/>
-            </a:pPr>
-            <a:r>
-              <a:rPr lang="en-US" sz="900" spc="225" kern="0" dirty="0">
-                <a:solidFill>
-                  <a:srgbClr val="6E734C"/>
-                </a:solidFill>
-                <a:latin typeface="Stack Sans Headline Light" pitchFamily="34" charset="0"/>
-                <a:ea typeface="Stack Sans Headline Light" pitchFamily="34" charset="-122"/>
-                <a:cs typeface="Stack Sans Headline Light" pitchFamily="34" charset="-120"/>
-              </a:rPr>
-              <a:t>OCEAN RCS · DESIGN SPECIMEN · DO NOT USE</a:t>
-            </a:r>
-            <a:endParaRPr lang="en-US" sz="900" dirty="0"/>
-          </a:p>
-        </p:txBody>
       </p:sp>
       <p:graphicFrame>
         <p:nvGraphicFramePr>
@@ -6390,7 +6368,7 @@
       </p:graphicFrame>
       <p:sp>
         <p:nvSpPr>
-          <p:cNvPr id="30" name="ocean:footnote"/>
+          <p:cNvPr id="29" name="ocean:footnote"/>
           <p:cNvSpPr/>
           <p:nvPr/>
         </p:nvSpPr>
@@ -6425,6 +6403,48 @@
                 <a:cs typeface="Stack Sans Headline Light" pitchFamily="34" charset="-120"/>
               </a:rPr>
               <a:t>ILLUSTRATIVE FIGURES · SPECIMEN</a:t>
+            </a:r>
+            <a:endParaRPr lang="en-US" sz="900" dirty="0"/>
+          </a:p>
+        </p:txBody>
+      </p:sp>
+      <p:sp>
+        <p:nvSpPr>
+          <p:cNvPr id="30" name="ocean:footer"/>
+          <p:cNvSpPr/>
+          <p:nvPr/>
+        </p:nvSpPr>
+        <p:spPr>
+          <a:xfrm>
+            <a:off x="548640" y="6419088"/>
+            <a:ext cx="7315200" cy="182880"/>
+          </a:xfrm>
+          <a:prstGeom prst="rect">
+            <a:avLst/>
+          </a:prstGeom>
+          <a:noFill/>
+          <a:ln/>
+        </p:spPr>
+        <p:txBody>
+          <a:bodyPr wrap="square" lIns="0" tIns="0" rIns="0" bIns="0" rtlCol="0" anchor="t"/>
+          <a:lstStyle/>
+          <a:p>
+            <a:pPr algn="l" indent="0" marL="0">
+              <a:lnSpc>
+                <a:spcPts val="1116"/>
+              </a:lnSpc>
+              <a:buNone/>
+            </a:pPr>
+            <a:r>
+              <a:rPr lang="en-US" sz="900" spc="225" kern="0" dirty="0">
+                <a:solidFill>
+                  <a:srgbClr val="6E734C"/>
+                </a:solidFill>
+                <a:latin typeface="Stack Sans Headline Light" pitchFamily="34" charset="0"/>
+                <a:ea typeface="Stack Sans Headline Light" pitchFamily="34" charset="-122"/>
+                <a:cs typeface="Stack Sans Headline Light" pitchFamily="34" charset="-120"/>
+              </a:rPr>
+              <a:t>OCEAN RCS · CONFIDENTIAL · DESIGN SPECIMEN · DO NOT USE</a:t>
             </a:r>
             <a:endParaRPr lang="en-US" sz="900" dirty="0"/>
           </a:p>
@@ -6602,8 +6622,8 @@
         </p:nvSpPr>
         <p:spPr>
           <a:xfrm>
-            <a:off x="5458968" y="4059936"/>
-            <a:ext cx="6217920" cy="1645920"/>
+            <a:off x="5458968" y="3931920"/>
+            <a:ext cx="6217920" cy="1920240"/>
           </a:xfrm>
           <a:prstGeom prst="rect">
             <a:avLst/>
@@ -7769,33 +7789,33 @@
       </p:sp>
       <p:sp>
         <p:nvSpPr>
-          <p:cNvPr id="29" name="ocean:footer"/>
-          <p:cNvSpPr/>
-          <p:nvPr/>
-        </p:nvSpPr>
-        <p:spPr>
-          <a:xfrm>
-            <a:off x="548640" y="6419088"/>
-            <a:ext cx="7315200" cy="182880"/>
-          </a:xfrm>
-          <a:prstGeom prst="rect">
-            <a:avLst/>
-          </a:prstGeom>
-          <a:noFill/>
-          <a:ln/>
-        </p:spPr>
-        <p:txBody>
-          <a:bodyPr wrap="square" lIns="0" tIns="0" rIns="0" bIns="0" rtlCol="0" anchor="t"/>
-          <a:lstStyle/>
-          <a:p>
-            <a:pPr algn="l" indent="0" marL="0">
-              <a:lnSpc>
-                <a:spcPts val="1116"/>
-              </a:lnSpc>
-              <a:buNone/>
-            </a:pPr>
-            <a:r>
-              <a:rPr lang="en-US" sz="900" spc="225" kern="0" dirty="0">
+          <p:cNvPr id="29" name="ocean:label"/>
+          <p:cNvSpPr/>
+          <p:nvPr/>
+        </p:nvSpPr>
+        <p:spPr>
+          <a:xfrm>
+            <a:off x="548640" y="3044952"/>
+            <a:ext cx="5120640" cy="201168"/>
+          </a:xfrm>
+          <a:prstGeom prst="rect">
+            <a:avLst/>
+          </a:prstGeom>
+          <a:noFill/>
+          <a:ln/>
+        </p:spPr>
+        <p:txBody>
+          <a:bodyPr wrap="square" lIns="0" tIns="0" rIns="0" bIns="0" rtlCol="0" anchor="t"/>
+          <a:lstStyle/>
+          <a:p>
+            <a:pPr algn="l" indent="0" marL="0">
+              <a:lnSpc>
+                <a:spcPts val="1302"/>
+              </a:lnSpc>
+              <a:buNone/>
+            </a:pPr>
+            <a:r>
+              <a:rPr lang="en-US" sz="1050" spc="263" kern="0" dirty="0">
                 <a:solidFill>
                   <a:srgbClr val="0B1617"/>
                 </a:solidFill>
@@ -7803,41 +7823,41 @@
                 <a:ea typeface="Stack Sans Headline Light" pitchFamily="34" charset="-122"/>
                 <a:cs typeface="Stack Sans Headline Light" pitchFamily="34" charset="-120"/>
               </a:rPr>
-              <a:t>OCEAN RCS · DESIGN SPECIMEN · DO NOT USE</a:t>
-            </a:r>
-            <a:endParaRPr lang="en-US" sz="900" dirty="0"/>
-          </a:p>
-        </p:txBody>
-      </p:sp>
-      <p:sp>
-        <p:nvSpPr>
-          <p:cNvPr id="30" name="ocean:label"/>
-          <p:cNvSpPr/>
-          <p:nvPr/>
-        </p:nvSpPr>
-        <p:spPr>
-          <a:xfrm>
-            <a:off x="548640" y="3044952"/>
-            <a:ext cx="5120640" cy="201168"/>
-          </a:xfrm>
-          <a:prstGeom prst="rect">
-            <a:avLst/>
-          </a:prstGeom>
-          <a:noFill/>
-          <a:ln/>
-        </p:spPr>
-        <p:txBody>
-          <a:bodyPr wrap="square" lIns="0" tIns="0" rIns="0" bIns="0" rtlCol="0" anchor="t"/>
-          <a:lstStyle/>
-          <a:p>
-            <a:pPr algn="l" indent="0" marL="0">
-              <a:lnSpc>
-                <a:spcPts val="1302"/>
-              </a:lnSpc>
-              <a:buNone/>
-            </a:pPr>
-            <a:r>
-              <a:rPr lang="en-US" sz="1050" spc="263" kern="0" dirty="0">
+              <a:t>VERIFIED PROJECT AMOUNT</a:t>
+            </a:r>
+            <a:endParaRPr lang="en-US" sz="1050" dirty="0"/>
+          </a:p>
+        </p:txBody>
+      </p:sp>
+      <p:sp>
+        <p:nvSpPr>
+          <p:cNvPr id="30" name="ocean:metric"/>
+          <p:cNvSpPr/>
+          <p:nvPr/>
+        </p:nvSpPr>
+        <p:spPr>
+          <a:xfrm>
+            <a:off x="521208" y="3319272"/>
+            <a:ext cx="5120640" cy="868680"/>
+          </a:xfrm>
+          <a:prstGeom prst="rect">
+            <a:avLst/>
+          </a:prstGeom>
+          <a:noFill/>
+          <a:ln/>
+        </p:spPr>
+        <p:txBody>
+          <a:bodyPr wrap="square" lIns="0" tIns="0" rIns="0" bIns="0" rtlCol="0" anchor="t"/>
+          <a:lstStyle/>
+          <a:p>
+            <a:pPr algn="l" indent="0" marL="0">
+              <a:lnSpc>
+                <a:spcPts val="6400"/>
+              </a:lnSpc>
+              <a:buNone/>
+            </a:pPr>
+            <a:r>
+              <a:rPr lang="en-US" sz="6000" spc="-120" kern="0" dirty="0">
                 <a:solidFill>
                   <a:srgbClr val="0B1617"/>
                 </a:solidFill>
@@ -7845,48 +7865,6 @@
                 <a:ea typeface="Stack Sans Headline Light" pitchFamily="34" charset="-122"/>
                 <a:cs typeface="Stack Sans Headline Light" pitchFamily="34" charset="-120"/>
               </a:rPr>
-              <a:t>VERIFIED PROJECT AMOUNT</a:t>
-            </a:r>
-            <a:endParaRPr lang="en-US" sz="1050" dirty="0"/>
-          </a:p>
-        </p:txBody>
-      </p:sp>
-      <p:sp>
-        <p:nvSpPr>
-          <p:cNvPr id="31" name="ocean:metric"/>
-          <p:cNvSpPr/>
-          <p:nvPr/>
-        </p:nvSpPr>
-        <p:spPr>
-          <a:xfrm>
-            <a:off x="521208" y="3319272"/>
-            <a:ext cx="5120640" cy="868680"/>
-          </a:xfrm>
-          <a:prstGeom prst="rect">
-            <a:avLst/>
-          </a:prstGeom>
-          <a:noFill/>
-          <a:ln/>
-        </p:spPr>
-        <p:txBody>
-          <a:bodyPr wrap="square" lIns="0" tIns="0" rIns="0" bIns="0" rtlCol="0" anchor="t"/>
-          <a:lstStyle/>
-          <a:p>
-            <a:pPr algn="l" indent="0" marL="0">
-              <a:lnSpc>
-                <a:spcPts val="6400"/>
-              </a:lnSpc>
-              <a:buNone/>
-            </a:pPr>
-            <a:r>
-              <a:rPr lang="en-US" sz="6000" spc="-120" kern="0" dirty="0">
-                <a:solidFill>
-                  <a:srgbClr val="0B1617"/>
-                </a:solidFill>
-                <a:latin typeface="Stack Sans Headline Light" pitchFamily="34" charset="0"/>
-                <a:ea typeface="Stack Sans Headline Light" pitchFamily="34" charset="-122"/>
-                <a:cs typeface="Stack Sans Headline Light" pitchFamily="34" charset="-120"/>
-              </a:rPr>
               <a:t>[TBD]</a:t>
             </a:r>
             <a:endParaRPr lang="en-US" sz="6000" dirty="0"/>
@@ -7895,7 +7873,7 @@
       </p:sp>
       <p:sp>
         <p:nvSpPr>
-          <p:cNvPr id="32" name="Shape 28"/>
+          <p:cNvPr id="31" name="Shape 27"/>
           <p:cNvSpPr/>
           <p:nvPr/>
         </p:nvSpPr>
@@ -7918,7 +7896,7 @@
       </p:sp>
       <p:sp>
         <p:nvSpPr>
-          <p:cNvPr id="33" name="ocean:body"/>
+          <p:cNvPr id="32" name="ocean:body"/>
           <p:cNvSpPr/>
           <p:nvPr/>
         </p:nvSpPr>
@@ -7960,7 +7938,7 @@
       </p:sp>
       <p:sp>
         <p:nvSpPr>
-          <p:cNvPr id="34" name="ocean:body"/>
+          <p:cNvPr id="33" name="ocean:body"/>
           <p:cNvSpPr/>
           <p:nvPr/>
         </p:nvSpPr>
@@ -8002,7 +7980,7 @@
       </p:sp>
       <p:sp>
         <p:nvSpPr>
-          <p:cNvPr id="35" name="Shape 31"/>
+          <p:cNvPr id="34" name="Shape 30"/>
           <p:cNvSpPr/>
           <p:nvPr/>
         </p:nvSpPr>
@@ -8025,7 +8003,7 @@
       </p:sp>
       <p:sp>
         <p:nvSpPr>
-          <p:cNvPr id="36" name="ocean:body"/>
+          <p:cNvPr id="35" name="ocean:body"/>
           <p:cNvSpPr/>
           <p:nvPr/>
         </p:nvSpPr>
@@ -8067,7 +8045,7 @@
       </p:sp>
       <p:sp>
         <p:nvSpPr>
-          <p:cNvPr id="37" name="ocean:body"/>
+          <p:cNvPr id="36" name="ocean:body"/>
           <p:cNvSpPr/>
           <p:nvPr/>
         </p:nvSpPr>
@@ -8109,7 +8087,7 @@
       </p:sp>
       <p:sp>
         <p:nvSpPr>
-          <p:cNvPr id="38" name="ocean:frame"/>
+          <p:cNvPr id="37" name="ocean:frame"/>
           <p:cNvSpPr/>
           <p:nvPr/>
         </p:nvSpPr>
@@ -8170,7 +8148,7 @@
       </p:sp>
       <p:sp>
         <p:nvSpPr>
-          <p:cNvPr id="39" name="Shape 35"/>
+          <p:cNvPr id="38" name="Shape 34"/>
           <p:cNvSpPr/>
           <p:nvPr/>
         </p:nvSpPr>
@@ -8195,7 +8173,7 @@
       </p:sp>
       <p:sp>
         <p:nvSpPr>
-          <p:cNvPr id="40" name="ocean:label"/>
+          <p:cNvPr id="39" name="ocean:label"/>
           <p:cNvSpPr/>
           <p:nvPr/>
         </p:nvSpPr>
@@ -8237,7 +8215,7 @@
       </p:sp>
       <p:sp>
         <p:nvSpPr>
-          <p:cNvPr id="41" name="ocean:body"/>
+          <p:cNvPr id="40" name="ocean:body"/>
           <p:cNvSpPr/>
           <p:nvPr/>
         </p:nvSpPr>
@@ -8279,7 +8257,7 @@
       </p:sp>
       <p:sp>
         <p:nvSpPr>
-          <p:cNvPr id="42" name="ocean:frame"/>
+          <p:cNvPr id="41" name="ocean:frame"/>
           <p:cNvSpPr/>
           <p:nvPr/>
         </p:nvSpPr>
@@ -8340,7 +8318,7 @@
       </p:sp>
       <p:sp>
         <p:nvSpPr>
-          <p:cNvPr id="43" name="Shape 39"/>
+          <p:cNvPr id="42" name="Shape 38"/>
           <p:cNvSpPr/>
           <p:nvPr/>
         </p:nvSpPr>
@@ -8365,7 +8343,7 @@
       </p:sp>
       <p:sp>
         <p:nvSpPr>
-          <p:cNvPr id="44" name="Shape 40"/>
+          <p:cNvPr id="43" name="Shape 39"/>
           <p:cNvSpPr/>
           <p:nvPr/>
         </p:nvSpPr>
@@ -8390,7 +8368,7 @@
       </p:sp>
       <p:sp>
         <p:nvSpPr>
-          <p:cNvPr id="45" name="ocean:label"/>
+          <p:cNvPr id="44" name="ocean:label"/>
           <p:cNvSpPr/>
           <p:nvPr/>
         </p:nvSpPr>
@@ -8432,7 +8410,7 @@
       </p:sp>
       <p:sp>
         <p:nvSpPr>
-          <p:cNvPr id="46" name="ocean:body"/>
+          <p:cNvPr id="45" name="ocean:body"/>
           <p:cNvSpPr/>
           <p:nvPr/>
         </p:nvSpPr>
@@ -8474,7 +8452,7 @@
       </p:sp>
       <p:sp>
         <p:nvSpPr>
-          <p:cNvPr id="47" name="ocean:frame"/>
+          <p:cNvPr id="46" name="ocean:frame"/>
           <p:cNvSpPr/>
           <p:nvPr/>
         </p:nvSpPr>
@@ -8535,7 +8513,7 @@
       </p:sp>
       <p:sp>
         <p:nvSpPr>
-          <p:cNvPr id="48" name="Shape 44"/>
+          <p:cNvPr id="47" name="Shape 43"/>
           <p:cNvSpPr/>
           <p:nvPr/>
         </p:nvSpPr>
@@ -8560,7 +8538,7 @@
       </p:sp>
       <p:sp>
         <p:nvSpPr>
-          <p:cNvPr id="49" name="Shape 45"/>
+          <p:cNvPr id="48" name="Shape 44"/>
           <p:cNvSpPr/>
           <p:nvPr/>
         </p:nvSpPr>
@@ -8585,7 +8563,7 @@
       </p:sp>
       <p:sp>
         <p:nvSpPr>
-          <p:cNvPr id="50" name="Shape 46"/>
+          <p:cNvPr id="49" name="Shape 45"/>
           <p:cNvSpPr/>
           <p:nvPr/>
         </p:nvSpPr>
@@ -8610,7 +8588,7 @@
       </p:sp>
       <p:sp>
         <p:nvSpPr>
-          <p:cNvPr id="51" name="ocean:label"/>
+          <p:cNvPr id="50" name="ocean:label"/>
           <p:cNvSpPr/>
           <p:nvPr/>
         </p:nvSpPr>
@@ -8652,7 +8630,7 @@
       </p:sp>
       <p:sp>
         <p:nvSpPr>
-          <p:cNvPr id="52" name="ocean:body"/>
+          <p:cNvPr id="51" name="ocean:body"/>
           <p:cNvSpPr/>
           <p:nvPr/>
         </p:nvSpPr>
@@ -8689,6 +8667,48 @@
               <a:t>Confirm the agreed next action</a:t>
             </a:r>
             <a:endParaRPr lang="en-US" sz="1300" dirty="0"/>
+          </a:p>
+        </p:txBody>
+      </p:sp>
+      <p:sp>
+        <p:nvSpPr>
+          <p:cNvPr id="52" name="ocean:footer"/>
+          <p:cNvSpPr/>
+          <p:nvPr/>
+        </p:nvSpPr>
+        <p:spPr>
+          <a:xfrm>
+            <a:off x="548640" y="6419088"/>
+            <a:ext cx="7315200" cy="182880"/>
+          </a:xfrm>
+          <a:prstGeom prst="rect">
+            <a:avLst/>
+          </a:prstGeom>
+          <a:noFill/>
+          <a:ln/>
+        </p:spPr>
+        <p:txBody>
+          <a:bodyPr wrap="square" lIns="0" tIns="0" rIns="0" bIns="0" rtlCol="0" anchor="t"/>
+          <a:lstStyle/>
+          <a:p>
+            <a:pPr algn="l" indent="0" marL="0">
+              <a:lnSpc>
+                <a:spcPts val="1116"/>
+              </a:lnSpc>
+              <a:buNone/>
+            </a:pPr>
+            <a:r>
+              <a:rPr lang="en-US" sz="900" spc="225" kern="0" dirty="0">
+                <a:solidFill>
+                  <a:srgbClr val="0B1617"/>
+                </a:solidFill>
+                <a:latin typeface="Stack Sans Headline Light" pitchFamily="34" charset="0"/>
+                <a:ea typeface="Stack Sans Headline Light" pitchFamily="34" charset="-122"/>
+                <a:cs typeface="Stack Sans Headline Light" pitchFamily="34" charset="-120"/>
+              </a:rPr>
+              <a:t>OCEAN RCS · CONFIDENTIAL · DESIGN SPECIMEN · DO NOT USE</a:t>
+            </a:r>
+            <a:endParaRPr lang="en-US" sz="900" dirty="0"/>
           </a:p>
         </p:txBody>
       </p:sp>
@@ -9729,26 +9749,26 @@
         <p:spPr>
           <a:xfrm>
             <a:off x="548640" y="3566160"/>
-            <a:ext cx="11094415" cy="1280160"/>
-          </a:xfrm>
-          <a:prstGeom prst="rect">
-            <a:avLst/>
-          </a:prstGeom>
-          <a:noFill/>
-          <a:ln/>
-        </p:spPr>
-        <p:txBody>
-          <a:bodyPr wrap="square" lIns="0" tIns="0" rIns="0" bIns="0" rtlCol="0" anchor="t"/>
-          <a:lstStyle/>
-          <a:p>
-            <a:pPr algn="l" indent="0" marL="0">
-              <a:lnSpc>
-                <a:spcPts val="4400"/>
-              </a:lnSpc>
-              <a:buNone/>
-            </a:pPr>
-            <a:r>
-              <a:rPr lang="en-US" sz="4000" spc="-80" kern="0" dirty="0">
+            <a:ext cx="11094415" cy="1371600"/>
+          </a:xfrm>
+          <a:prstGeom prst="rect">
+            <a:avLst/>
+          </a:prstGeom>
+          <a:noFill/>
+          <a:ln/>
+        </p:spPr>
+        <p:txBody>
+          <a:bodyPr wrap="square" lIns="0" tIns="0" rIns="0" bIns="0" rtlCol="0" anchor="t"/>
+          <a:lstStyle/>
+          <a:p>
+            <a:pPr algn="l" indent="0" marL="0">
+              <a:lnSpc>
+                <a:spcPts val="4800"/>
+              </a:lnSpc>
+              <a:buNone/>
+            </a:pPr>
+            <a:r>
+              <a:rPr lang="en-US" sz="4400" spc="-88" kern="0" dirty="0">
                 <a:solidFill>
                   <a:srgbClr val="F3FBF8"/>
                 </a:solidFill>
@@ -9758,7 +9778,7 @@
               </a:rPr>
               <a:t>Clarity starts with the site</a:t>
             </a:r>
-            <a:endParaRPr lang="en-US" sz="4000" dirty="0"/>
+            <a:endParaRPr lang="en-US" sz="4400" dirty="0"/>
           </a:p>
         </p:txBody>
       </p:sp>
@@ -9770,7 +9790,7 @@
         </p:nvSpPr>
         <p:spPr>
           <a:xfrm>
-            <a:off x="548640" y="4983480"/>
+            <a:off x="548640" y="5074920"/>
             <a:ext cx="11094415" cy="822960"/>
           </a:xfrm>
           <a:prstGeom prst="rect">
@@ -10786,51 +10806,9 @@
           </a:ln>
         </p:spPr>
       </p:sp>
-      <p:sp>
-        <p:nvSpPr>
-          <p:cNvPr id="29" name="ocean:footer"/>
-          <p:cNvSpPr/>
-          <p:nvPr/>
-        </p:nvSpPr>
-        <p:spPr>
-          <a:xfrm>
-            <a:off x="548640" y="6419088"/>
-            <a:ext cx="7315200" cy="182880"/>
-          </a:xfrm>
-          <a:prstGeom prst="rect">
-            <a:avLst/>
-          </a:prstGeom>
-          <a:noFill/>
-          <a:ln/>
-        </p:spPr>
-        <p:txBody>
-          <a:bodyPr wrap="square" lIns="0" tIns="0" rIns="0" bIns="0" rtlCol="0" anchor="t"/>
-          <a:lstStyle/>
-          <a:p>
-            <a:pPr algn="l" indent="0" marL="0">
-              <a:lnSpc>
-                <a:spcPts val="1116"/>
-              </a:lnSpc>
-              <a:buNone/>
-            </a:pPr>
-            <a:r>
-              <a:rPr lang="en-US" sz="900" spc="225" kern="0" dirty="0">
-                <a:solidFill>
-                  <a:srgbClr val="102426"/>
-                </a:solidFill>
-                <a:latin typeface="Stack Sans Headline Light" pitchFamily="34" charset="0"/>
-                <a:ea typeface="Stack Sans Headline Light" pitchFamily="34" charset="-122"/>
-                <a:cs typeface="Stack Sans Headline Light" pitchFamily="34" charset="-120"/>
-              </a:rPr>
-              <a:t>OCEAN RCS · DESIGN SPECIMEN · DO NOT USE</a:t>
-            </a:r>
-            <a:endParaRPr lang="en-US" sz="900" dirty="0"/>
-          </a:p>
-        </p:txBody>
-      </p:sp>
       <p:pic>
         <p:nvPicPr>
-          <p:cNvPr id="30" name="ocean:photo" descr="/home/user/workspace/audit/repo/output/.cache/fit/rooftop-9961c474ed952cad.jpg">    </p:cNvPr>
+          <p:cNvPr id="29" name="ocean:photo" descr="/home/user/workspace/audit/repo/output/.cache/fit/rooftop-9961c474ed952cad.jpg">    </p:cNvPr>
           <p:cNvPicPr>
             <a:picLocks noChangeAspect="1"/>
           </p:cNvPicPr>
@@ -10854,7 +10832,7 @@
       </p:pic>
       <p:sp>
         <p:nvSpPr>
-          <p:cNvPr id="31" name="Shape 27"/>
+          <p:cNvPr id="30" name="Shape 26"/>
           <p:cNvSpPr/>
           <p:nvPr/>
         </p:nvSpPr>
@@ -10879,7 +10857,7 @@
       </p:sp>
       <p:sp>
         <p:nvSpPr>
-          <p:cNvPr id="32" name="ocean:frame"/>
+          <p:cNvPr id="31" name="ocean:frame"/>
           <p:cNvSpPr/>
           <p:nvPr/>
         </p:nvSpPr>
@@ -10940,7 +10918,7 @@
       </p:sp>
       <p:sp>
         <p:nvSpPr>
-          <p:cNvPr id="33" name="Shape 29"/>
+          <p:cNvPr id="32" name="Shape 28"/>
           <p:cNvSpPr/>
           <p:nvPr/>
         </p:nvSpPr>
@@ -10965,7 +10943,7 @@
       </p:sp>
       <p:sp>
         <p:nvSpPr>
-          <p:cNvPr id="34" name="ocean:label"/>
+          <p:cNvPr id="33" name="ocean:label"/>
           <p:cNvSpPr/>
           <p:nvPr/>
         </p:nvSpPr>
@@ -11007,7 +10985,7 @@
       </p:sp>
       <p:sp>
         <p:nvSpPr>
-          <p:cNvPr id="35" name="ocean:body"/>
+          <p:cNvPr id="34" name="ocean:body"/>
           <p:cNvSpPr/>
           <p:nvPr/>
         </p:nvSpPr>
@@ -11049,7 +11027,7 @@
       </p:sp>
       <p:sp>
         <p:nvSpPr>
-          <p:cNvPr id="36" name="ocean:frame"/>
+          <p:cNvPr id="35" name="ocean:frame"/>
           <p:cNvSpPr/>
           <p:nvPr/>
         </p:nvSpPr>
@@ -11110,7 +11088,7 @@
       </p:sp>
       <p:sp>
         <p:nvSpPr>
-          <p:cNvPr id="37" name="Shape 33"/>
+          <p:cNvPr id="36" name="Shape 32"/>
           <p:cNvSpPr/>
           <p:nvPr/>
         </p:nvSpPr>
@@ -11135,7 +11113,7 @@
       </p:sp>
       <p:sp>
         <p:nvSpPr>
-          <p:cNvPr id="38" name="Shape 34"/>
+          <p:cNvPr id="37" name="Shape 33"/>
           <p:cNvSpPr/>
           <p:nvPr/>
         </p:nvSpPr>
@@ -11160,7 +11138,7 @@
       </p:sp>
       <p:sp>
         <p:nvSpPr>
-          <p:cNvPr id="39" name="ocean:label"/>
+          <p:cNvPr id="38" name="ocean:label"/>
           <p:cNvSpPr/>
           <p:nvPr/>
         </p:nvSpPr>
@@ -11202,7 +11180,7 @@
       </p:sp>
       <p:sp>
         <p:nvSpPr>
-          <p:cNvPr id="40" name="ocean:body"/>
+          <p:cNvPr id="39" name="ocean:body"/>
           <p:cNvSpPr/>
           <p:nvPr/>
         </p:nvSpPr>
@@ -11244,7 +11222,7 @@
       </p:sp>
       <p:sp>
         <p:nvSpPr>
-          <p:cNvPr id="41" name="ocean:frame"/>
+          <p:cNvPr id="40" name="ocean:frame"/>
           <p:cNvSpPr/>
           <p:nvPr/>
         </p:nvSpPr>
@@ -11305,7 +11283,7 @@
       </p:sp>
       <p:sp>
         <p:nvSpPr>
-          <p:cNvPr id="42" name="Shape 38"/>
+          <p:cNvPr id="41" name="Shape 37"/>
           <p:cNvSpPr/>
           <p:nvPr/>
         </p:nvSpPr>
@@ -11330,7 +11308,7 @@
       </p:sp>
       <p:sp>
         <p:nvSpPr>
-          <p:cNvPr id="43" name="Shape 39"/>
+          <p:cNvPr id="42" name="Shape 38"/>
           <p:cNvSpPr/>
           <p:nvPr/>
         </p:nvSpPr>
@@ -11355,7 +11333,7 @@
       </p:sp>
       <p:sp>
         <p:nvSpPr>
-          <p:cNvPr id="44" name="Shape 40"/>
+          <p:cNvPr id="43" name="Shape 39"/>
           <p:cNvSpPr/>
           <p:nvPr/>
         </p:nvSpPr>
@@ -11380,7 +11358,7 @@
       </p:sp>
       <p:sp>
         <p:nvSpPr>
-          <p:cNvPr id="45" name="ocean:label"/>
+          <p:cNvPr id="44" name="ocean:label"/>
           <p:cNvSpPr/>
           <p:nvPr/>
         </p:nvSpPr>
@@ -11422,7 +11400,7 @@
       </p:sp>
       <p:sp>
         <p:nvSpPr>
-          <p:cNvPr id="46" name="ocean:body"/>
+          <p:cNvPr id="45" name="ocean:body"/>
           <p:cNvSpPr/>
           <p:nvPr/>
         </p:nvSpPr>
@@ -11464,7 +11442,7 @@
       </p:sp>
       <p:sp>
         <p:nvSpPr>
-          <p:cNvPr id="47" name="ocean:body"/>
+          <p:cNvPr id="46" name="ocean:body"/>
           <p:cNvSpPr/>
           <p:nvPr/>
         </p:nvSpPr>
@@ -11501,6 +11479,48 @@
               <a:t>Representative image of a comparable rooftop array.</a:t>
             </a:r>
             <a:endParaRPr lang="en-US" sz="1200" dirty="0"/>
+          </a:p>
+        </p:txBody>
+      </p:sp>
+      <p:sp>
+        <p:nvSpPr>
+          <p:cNvPr id="47" name="ocean:footer"/>
+          <p:cNvSpPr/>
+          <p:nvPr/>
+        </p:nvSpPr>
+        <p:spPr>
+          <a:xfrm>
+            <a:off x="548640" y="6419088"/>
+            <a:ext cx="7315200" cy="182880"/>
+          </a:xfrm>
+          <a:prstGeom prst="rect">
+            <a:avLst/>
+          </a:prstGeom>
+          <a:noFill/>
+          <a:ln/>
+        </p:spPr>
+        <p:txBody>
+          <a:bodyPr wrap="square" lIns="0" tIns="0" rIns="0" bIns="0" rtlCol="0" anchor="t"/>
+          <a:lstStyle/>
+          <a:p>
+            <a:pPr algn="l" indent="0" marL="0">
+              <a:lnSpc>
+                <a:spcPts val="1116"/>
+              </a:lnSpc>
+              <a:buNone/>
+            </a:pPr>
+            <a:r>
+              <a:rPr lang="en-US" sz="900" spc="225" kern="0" dirty="0">
+                <a:solidFill>
+                  <a:srgbClr val="102426"/>
+                </a:solidFill>
+                <a:latin typeface="Stack Sans Headline Light" pitchFamily="34" charset="0"/>
+                <a:ea typeface="Stack Sans Headline Light" pitchFamily="34" charset="-122"/>
+                <a:cs typeface="Stack Sans Headline Light" pitchFamily="34" charset="-120"/>
+              </a:rPr>
+              <a:t>OCEAN RCS · CONFIDENTIAL · DESIGN SPECIMEN · DO NOT USE</a:t>
+            </a:r>
+            <a:endParaRPr lang="en-US" sz="900" dirty="0"/>
           </a:p>
         </p:txBody>
       </p:sp>
@@ -12468,49 +12488,7 @@
       </p:sp>
       <p:sp>
         <p:nvSpPr>
-          <p:cNvPr id="29" name="ocean:footer"/>
-          <p:cNvSpPr/>
-          <p:nvPr/>
-        </p:nvSpPr>
-        <p:spPr>
-          <a:xfrm>
-            <a:off x="548640" y="6419088"/>
-            <a:ext cx="7315200" cy="182880"/>
-          </a:xfrm>
-          <a:prstGeom prst="rect">
-            <a:avLst/>
-          </a:prstGeom>
-          <a:noFill/>
-          <a:ln/>
-        </p:spPr>
-        <p:txBody>
-          <a:bodyPr wrap="square" lIns="0" tIns="0" rIns="0" bIns="0" rtlCol="0" anchor="t"/>
-          <a:lstStyle/>
-          <a:p>
-            <a:pPr algn="l" indent="0" marL="0">
-              <a:lnSpc>
-                <a:spcPts val="1116"/>
-              </a:lnSpc>
-              <a:buNone/>
-            </a:pPr>
-            <a:r>
-              <a:rPr lang="en-US" sz="900" spc="225" kern="0" dirty="0">
-                <a:solidFill>
-                  <a:srgbClr val="102426"/>
-                </a:solidFill>
-                <a:latin typeface="Stack Sans Headline Light" pitchFamily="34" charset="0"/>
-                <a:ea typeface="Stack Sans Headline Light" pitchFamily="34" charset="-122"/>
-                <a:cs typeface="Stack Sans Headline Light" pitchFamily="34" charset="-120"/>
-              </a:rPr>
-              <a:t>OCEAN RCS · DESIGN SPECIMEN · DO NOT USE</a:t>
-            </a:r>
-            <a:endParaRPr lang="en-US" sz="900" dirty="0"/>
-          </a:p>
-        </p:txBody>
-      </p:sp>
-      <p:sp>
-        <p:nvSpPr>
-          <p:cNvPr id="30" name="ocean:frame"/>
+          <p:cNvPr id="29" name="ocean:frame"/>
           <p:cNvSpPr/>
           <p:nvPr/>
         </p:nvSpPr>
@@ -12571,7 +12549,7 @@
       </p:sp>
       <p:sp>
         <p:nvSpPr>
-          <p:cNvPr id="31" name="Shape 28"/>
+          <p:cNvPr id="30" name="Shape 27"/>
           <p:cNvSpPr/>
           <p:nvPr/>
         </p:nvSpPr>
@@ -12596,7 +12574,7 @@
       </p:sp>
       <p:sp>
         <p:nvSpPr>
-          <p:cNvPr id="32" name="ocean:label"/>
+          <p:cNvPr id="31" name="ocean:label"/>
           <p:cNvSpPr/>
           <p:nvPr/>
         </p:nvSpPr>
@@ -12638,7 +12616,7 @@
       </p:sp>
       <p:sp>
         <p:nvSpPr>
-          <p:cNvPr id="33" name="ocean:metric"/>
+          <p:cNvPr id="32" name="ocean:metric"/>
           <p:cNvSpPr/>
           <p:nvPr/>
         </p:nvSpPr>
@@ -12680,7 +12658,7 @@
       </p:sp>
       <p:sp>
         <p:nvSpPr>
-          <p:cNvPr id="34" name="ocean:label"/>
+          <p:cNvPr id="33" name="ocean:label"/>
           <p:cNvSpPr/>
           <p:nvPr/>
         </p:nvSpPr>
@@ -12722,7 +12700,7 @@
       </p:sp>
       <p:sp>
         <p:nvSpPr>
-          <p:cNvPr id="35" name="ocean:frame"/>
+          <p:cNvPr id="34" name="ocean:frame"/>
           <p:cNvSpPr/>
           <p:nvPr/>
         </p:nvSpPr>
@@ -12783,7 +12761,7 @@
       </p:sp>
       <p:sp>
         <p:nvSpPr>
-          <p:cNvPr id="36" name="Shape 33"/>
+          <p:cNvPr id="35" name="Shape 32"/>
           <p:cNvSpPr/>
           <p:nvPr/>
         </p:nvSpPr>
@@ -12808,7 +12786,7 @@
       </p:sp>
       <p:sp>
         <p:nvSpPr>
-          <p:cNvPr id="37" name="Shape 34"/>
+          <p:cNvPr id="36" name="Shape 33"/>
           <p:cNvSpPr/>
           <p:nvPr/>
         </p:nvSpPr>
@@ -12833,7 +12811,7 @@
       </p:sp>
       <p:sp>
         <p:nvSpPr>
-          <p:cNvPr id="38" name="ocean:label"/>
+          <p:cNvPr id="37" name="ocean:label"/>
           <p:cNvSpPr/>
           <p:nvPr/>
         </p:nvSpPr>
@@ -12875,7 +12853,7 @@
       </p:sp>
       <p:sp>
         <p:nvSpPr>
-          <p:cNvPr id="39" name="ocean:metric"/>
+          <p:cNvPr id="38" name="ocean:metric"/>
           <p:cNvSpPr/>
           <p:nvPr/>
         </p:nvSpPr>
@@ -12917,7 +12895,7 @@
       </p:sp>
       <p:sp>
         <p:nvSpPr>
-          <p:cNvPr id="40" name="ocean:label"/>
+          <p:cNvPr id="39" name="ocean:label"/>
           <p:cNvSpPr/>
           <p:nvPr/>
         </p:nvSpPr>
@@ -12959,7 +12937,7 @@
       </p:sp>
       <p:sp>
         <p:nvSpPr>
-          <p:cNvPr id="41" name="ocean:frame"/>
+          <p:cNvPr id="40" name="ocean:frame"/>
           <p:cNvSpPr/>
           <p:nvPr/>
         </p:nvSpPr>
@@ -13020,7 +12998,7 @@
       </p:sp>
       <p:sp>
         <p:nvSpPr>
-          <p:cNvPr id="42" name="Shape 39"/>
+          <p:cNvPr id="41" name="Shape 38"/>
           <p:cNvSpPr/>
           <p:nvPr/>
         </p:nvSpPr>
@@ -13045,7 +13023,7 @@
       </p:sp>
       <p:sp>
         <p:nvSpPr>
-          <p:cNvPr id="43" name="Shape 40"/>
+          <p:cNvPr id="42" name="Shape 39"/>
           <p:cNvSpPr/>
           <p:nvPr/>
         </p:nvSpPr>
@@ -13070,7 +13048,7 @@
       </p:sp>
       <p:sp>
         <p:nvSpPr>
-          <p:cNvPr id="44" name="Shape 41"/>
+          <p:cNvPr id="43" name="Shape 40"/>
           <p:cNvSpPr/>
           <p:nvPr/>
         </p:nvSpPr>
@@ -13095,7 +13073,7 @@
       </p:sp>
       <p:sp>
         <p:nvSpPr>
-          <p:cNvPr id="45" name="ocean:label"/>
+          <p:cNvPr id="44" name="ocean:label"/>
           <p:cNvSpPr/>
           <p:nvPr/>
         </p:nvSpPr>
@@ -13137,7 +13115,7 @@
       </p:sp>
       <p:sp>
         <p:nvSpPr>
-          <p:cNvPr id="46" name="ocean:metric"/>
+          <p:cNvPr id="45" name="ocean:metric"/>
           <p:cNvSpPr/>
           <p:nvPr/>
         </p:nvSpPr>
@@ -13179,7 +13157,7 @@
       </p:sp>
       <p:sp>
         <p:nvSpPr>
-          <p:cNvPr id="47" name="ocean:label"/>
+          <p:cNvPr id="46" name="ocean:label"/>
           <p:cNvSpPr/>
           <p:nvPr/>
         </p:nvSpPr>
@@ -13221,7 +13199,7 @@
       </p:sp>
       <p:sp>
         <p:nvSpPr>
-          <p:cNvPr id="48" name="ocean:frame"/>
+          <p:cNvPr id="47" name="ocean:frame"/>
           <p:cNvSpPr/>
           <p:nvPr/>
         </p:nvSpPr>
@@ -13285,7 +13263,7 @@
       </p:sp>
       <p:sp>
         <p:nvSpPr>
-          <p:cNvPr id="49" name="Shape 46"/>
+          <p:cNvPr id="48" name="Shape 45"/>
           <p:cNvSpPr/>
           <p:nvPr/>
         </p:nvSpPr>
@@ -13310,7 +13288,7 @@
       </p:sp>
       <p:sp>
         <p:nvSpPr>
-          <p:cNvPr id="50" name="Shape 47"/>
+          <p:cNvPr id="49" name="Shape 46"/>
           <p:cNvSpPr/>
           <p:nvPr/>
         </p:nvSpPr>
@@ -13335,7 +13313,7 @@
       </p:sp>
       <p:sp>
         <p:nvSpPr>
-          <p:cNvPr id="51" name="Shape 48"/>
+          <p:cNvPr id="50" name="Shape 47"/>
           <p:cNvSpPr/>
           <p:nvPr/>
         </p:nvSpPr>
@@ -13360,7 +13338,7 @@
       </p:sp>
       <p:sp>
         <p:nvSpPr>
-          <p:cNvPr id="52" name="Shape 49"/>
+          <p:cNvPr id="51" name="Shape 48"/>
           <p:cNvSpPr/>
           <p:nvPr/>
         </p:nvSpPr>
@@ -13385,7 +13363,7 @@
       </p:sp>
       <p:sp>
         <p:nvSpPr>
-          <p:cNvPr id="53" name="ocean:label"/>
+          <p:cNvPr id="52" name="ocean:label"/>
           <p:cNvSpPr/>
           <p:nvPr/>
         </p:nvSpPr>
@@ -13427,7 +13405,7 @@
       </p:sp>
       <p:sp>
         <p:nvSpPr>
-          <p:cNvPr id="54" name="ocean:metric"/>
+          <p:cNvPr id="53" name="ocean:metric"/>
           <p:cNvSpPr/>
           <p:nvPr/>
         </p:nvSpPr>
@@ -13469,7 +13447,7 @@
       </p:sp>
       <p:sp>
         <p:nvSpPr>
-          <p:cNvPr id="55" name="ocean:label"/>
+          <p:cNvPr id="54" name="ocean:label"/>
           <p:cNvSpPr/>
           <p:nvPr/>
         </p:nvSpPr>
@@ -13511,7 +13489,7 @@
       </p:sp>
       <p:sp>
         <p:nvSpPr>
-          <p:cNvPr id="56" name="ocean:bottom-line"/>
+          <p:cNvPr id="55" name="ocean:bottom-line"/>
           <p:cNvSpPr/>
           <p:nvPr/>
         </p:nvSpPr>
@@ -13575,7 +13553,7 @@
       </p:sp>
       <p:sp>
         <p:nvSpPr>
-          <p:cNvPr id="57" name="Shape 54"/>
+          <p:cNvPr id="56" name="Shape 53"/>
           <p:cNvSpPr/>
           <p:nvPr/>
         </p:nvSpPr>
@@ -13600,7 +13578,7 @@
       </p:sp>
       <p:sp>
         <p:nvSpPr>
-          <p:cNvPr id="58" name="ocean:label"/>
+          <p:cNvPr id="57" name="ocean:label"/>
           <p:cNvSpPr/>
           <p:nvPr/>
         </p:nvSpPr>
@@ -13642,7 +13620,7 @@
       </p:sp>
       <p:sp>
         <p:nvSpPr>
-          <p:cNvPr id="59" name="ocean:bottom-line"/>
+          <p:cNvPr id="58" name="ocean:bottom-line"/>
           <p:cNvSpPr/>
           <p:nvPr/>
         </p:nvSpPr>
@@ -13684,7 +13662,7 @@
       </p:sp>
       <p:sp>
         <p:nvSpPr>
-          <p:cNvPr id="60" name="ocean:footnote"/>
+          <p:cNvPr id="59" name="ocean:footnote"/>
           <p:cNvSpPr/>
           <p:nvPr/>
         </p:nvSpPr>
@@ -13719,6 +13697,48 @@
                 <a:cs typeface="Stack Sans Headline Light" pitchFamily="34" charset="-120"/>
               </a:rPr>
               <a:t>ILLUSTRATIVE FIGURES · SPECIMEN</a:t>
+            </a:r>
+            <a:endParaRPr lang="en-US" sz="900" dirty="0"/>
+          </a:p>
+        </p:txBody>
+      </p:sp>
+      <p:sp>
+        <p:nvSpPr>
+          <p:cNvPr id="60" name="ocean:footer"/>
+          <p:cNvSpPr/>
+          <p:nvPr/>
+        </p:nvSpPr>
+        <p:spPr>
+          <a:xfrm>
+            <a:off x="548640" y="6419088"/>
+            <a:ext cx="7315200" cy="182880"/>
+          </a:xfrm>
+          <a:prstGeom prst="rect">
+            <a:avLst/>
+          </a:prstGeom>
+          <a:noFill/>
+          <a:ln/>
+        </p:spPr>
+        <p:txBody>
+          <a:bodyPr wrap="square" lIns="0" tIns="0" rIns="0" bIns="0" rtlCol="0" anchor="t"/>
+          <a:lstStyle/>
+          <a:p>
+            <a:pPr algn="l" indent="0" marL="0">
+              <a:lnSpc>
+                <a:spcPts val="1116"/>
+              </a:lnSpc>
+              <a:buNone/>
+            </a:pPr>
+            <a:r>
+              <a:rPr lang="en-US" sz="900" spc="225" kern="0" dirty="0">
+                <a:solidFill>
+                  <a:srgbClr val="102426"/>
+                </a:solidFill>
+                <a:latin typeface="Stack Sans Headline Light" pitchFamily="34" charset="0"/>
+                <a:ea typeface="Stack Sans Headline Light" pitchFamily="34" charset="-122"/>
+                <a:cs typeface="Stack Sans Headline Light" pitchFamily="34" charset="-120"/>
+              </a:rPr>
+              <a:t>OCEAN RCS · CONFIDENTIAL · DESIGN SPECIMEN · DO NOT USE</a:t>
             </a:r>
             <a:endParaRPr lang="en-US" sz="900" dirty="0"/>
           </a:p>
@@ -13738,7 +13758,7 @@
     <p:bg>
       <p:bgPr>
         <a:solidFill>
-          <a:srgbClr val="1B4039"/>
+          <a:srgbClr val="D5CCA0"/>
         </a:solidFill>
       </p:bgPr>
     </p:bg>
@@ -13758,7 +13778,7 @@
       </p:grpSpPr>
       <p:pic>
         <p:nvPicPr>
-          <p:cNvPr id="2" name="ocean:environment" descr="/home/user/workspace/audit/repo/assets/environments/env_cedar_map_light.jpg">    </p:cNvPr>
+          <p:cNvPr id="2" name="ocean:environment" descr="/home/user/workspace/audit/repo/assets/environments/env_sprig_map_light_soft.jpg">    </p:cNvPr>
           <p:cNvPicPr>
             <a:picLocks noChangeAspect="1"/>
           </p:cNvPicPr>
@@ -13782,7 +13802,7 @@
       </p:pic>
       <p:pic>
         <p:nvPicPr>
-          <p:cNvPr id="3" name="ocean:logo-graphic" descr="/home/user/workspace/audit/repo/assets/logos/png/logo_graphic_sprig.png">    </p:cNvPr>
+          <p:cNvPr id="3" name="ocean:logo-graphic" descr="/home/user/workspace/audit/repo/assets/logos/png/logo_graphic_sage.png">    </p:cNvPr>
           <p:cNvPicPr>
             <a:picLocks noChangeAspect="1"/>
           </p:cNvPicPr>
@@ -13834,7 +13854,7 @@
             <a:r>
               <a:rPr lang="en-US" sz="12000" spc="-480" kern="0" dirty="0">
                 <a:solidFill>
-                  <a:srgbClr val="D5CCA0"/>
+                  <a:srgbClr val="618C7C"/>
                 </a:solidFill>
                 <a:latin typeface="Stack Sans Headline Light" pitchFamily="34" charset="0"/>
                 <a:ea typeface="Stack Sans Headline Light" pitchFamily="34" charset="-122"/>
@@ -13855,28 +13875,28 @@
         <p:spPr>
           <a:xfrm>
             <a:off x="548640" y="3566160"/>
-            <a:ext cx="11094415" cy="1280160"/>
-          </a:xfrm>
-          <a:prstGeom prst="rect">
-            <a:avLst/>
-          </a:prstGeom>
-          <a:noFill/>
-          <a:ln/>
-        </p:spPr>
-        <p:txBody>
-          <a:bodyPr wrap="square" lIns="0" tIns="0" rIns="0" bIns="0" rtlCol="0" anchor="t"/>
-          <a:lstStyle/>
-          <a:p>
-            <a:pPr algn="l" indent="0" marL="0">
-              <a:lnSpc>
-                <a:spcPts val="4400"/>
-              </a:lnSpc>
-              <a:buNone/>
-            </a:pPr>
-            <a:r>
-              <a:rPr lang="en-US" sz="4000" spc="-80" kern="0" dirty="0">
-                <a:solidFill>
-                  <a:srgbClr val="D5CCA0"/>
+            <a:ext cx="11094415" cy="1371600"/>
+          </a:xfrm>
+          <a:prstGeom prst="rect">
+            <a:avLst/>
+          </a:prstGeom>
+          <a:noFill/>
+          <a:ln/>
+        </p:spPr>
+        <p:txBody>
+          <a:bodyPr wrap="square" lIns="0" tIns="0" rIns="0" bIns="0" rtlCol="0" anchor="t"/>
+          <a:lstStyle/>
+          <a:p>
+            <a:pPr algn="l" indent="0" marL="0">
+              <a:lnSpc>
+                <a:spcPts val="4800"/>
+              </a:lnSpc>
+              <a:buNone/>
+            </a:pPr>
+            <a:r>
+              <a:rPr lang="en-US" sz="4400" spc="-88" kern="0" dirty="0">
+                <a:solidFill>
+                  <a:srgbClr val="618C7C"/>
                 </a:solidFill>
                 <a:latin typeface="Stack Sans Headline Medium" pitchFamily="34" charset="0"/>
                 <a:ea typeface="Stack Sans Headline Medium" pitchFamily="34" charset="-122"/>
@@ -13884,49 +13904,7 @@
               </a:rPr>
               <a:t>A system built for the building</a:t>
             </a:r>
-            <a:endParaRPr lang="en-US" sz="4000" dirty="0"/>
-          </a:p>
-        </p:txBody>
-      </p:sp>
-      <p:sp>
-        <p:nvSpPr>
-          <p:cNvPr id="6" name="ocean:subhead"/>
-          <p:cNvSpPr/>
-          <p:nvPr/>
-        </p:nvSpPr>
-        <p:spPr>
-          <a:xfrm>
-            <a:off x="548640" y="4983480"/>
-            <a:ext cx="11094415" cy="822960"/>
-          </a:xfrm>
-          <a:prstGeom prst="rect">
-            <a:avLst/>
-          </a:prstGeom>
-          <a:noFill/>
-          <a:ln/>
-        </p:spPr>
-        <p:txBody>
-          <a:bodyPr wrap="square" lIns="0" tIns="0" rIns="0" bIns="0" rtlCol="0" anchor="t"/>
-          <a:lstStyle/>
-          <a:p>
-            <a:pPr algn="l" indent="0" marL="0">
-              <a:lnSpc>
-                <a:spcPts val="1800"/>
-              </a:lnSpc>
-              <a:buNone/>
-            </a:pPr>
-            <a:r>
-              <a:rPr lang="en-US" sz="1100" b="1" spc="275" kern="0" dirty="0">
-                <a:solidFill>
-                  <a:srgbClr val="D5CCA0"/>
-                </a:solidFill>
-                <a:latin typeface="Stack Sans Headline" pitchFamily="34" charset="0"/>
-                <a:ea typeface="Stack Sans Headline" pitchFamily="34" charset="-122"/>
-                <a:cs typeface="Stack Sans Headline" pitchFamily="34" charset="-120"/>
-              </a:rPr>
-              <a:t>SOLAR, STORAGE AND INTERCONNECTION SIZED TO THE LOAD.</a:t>
-            </a:r>
-            <a:endParaRPr lang="en-US" sz="1100" dirty="0"/>
+            <a:endParaRPr lang="en-US" sz="4400" dirty="0"/>
           </a:p>
         </p:txBody>
       </p:sp>
@@ -14852,49 +14830,7 @@
       </p:sp>
       <p:sp>
         <p:nvSpPr>
-          <p:cNvPr id="28" name="ocean:footer"/>
-          <p:cNvSpPr/>
-          <p:nvPr/>
-        </p:nvSpPr>
-        <p:spPr>
-          <a:xfrm>
-            <a:off x="548640" y="6419088"/>
-            <a:ext cx="7315200" cy="182880"/>
-          </a:xfrm>
-          <a:prstGeom prst="rect">
-            <a:avLst/>
-          </a:prstGeom>
-          <a:noFill/>
-          <a:ln/>
-        </p:spPr>
-        <p:txBody>
-          <a:bodyPr wrap="square" lIns="0" tIns="0" rIns="0" bIns="0" rtlCol="0" anchor="t"/>
-          <a:lstStyle/>
-          <a:p>
-            <a:pPr algn="l" indent="0" marL="0">
-              <a:lnSpc>
-                <a:spcPts val="1116"/>
-              </a:lnSpc>
-              <a:buNone/>
-            </a:pPr>
-            <a:r>
-              <a:rPr lang="en-US" sz="900" spc="225" kern="0" dirty="0">
-                <a:solidFill>
-                  <a:srgbClr val="1B4039"/>
-                </a:solidFill>
-                <a:latin typeface="Stack Sans Headline Light" pitchFamily="34" charset="0"/>
-                <a:ea typeface="Stack Sans Headline Light" pitchFamily="34" charset="-122"/>
-                <a:cs typeface="Stack Sans Headline Light" pitchFamily="34" charset="-120"/>
-              </a:rPr>
-              <a:t>OCEAN RCS · DESIGN SPECIMEN · DO NOT USE</a:t>
-            </a:r>
-            <a:endParaRPr lang="en-US" sz="900" dirty="0"/>
-          </a:p>
-        </p:txBody>
-      </p:sp>
-      <p:sp>
-        <p:nvSpPr>
-          <p:cNvPr id="29" name="ocean:statement"/>
+          <p:cNvPr id="28" name="ocean:statement"/>
           <p:cNvSpPr/>
           <p:nvPr/>
         </p:nvSpPr>
@@ -15101,7 +15037,7 @@
       </p:sp>
       <p:pic>
         <p:nvPicPr>
-          <p:cNvPr id="30" name="ocean:photo" descr="/home/user/workspace/audit/repo/output/.cache/fit/worker-bde126986fe58e01.jpg">    </p:cNvPr>
+          <p:cNvPr id="29" name="ocean:photo" descr="/home/user/workspace/audit/repo/output/.cache/fit/worker-bde126986fe58e01.jpg">    </p:cNvPr>
           <p:cNvPicPr>
             <a:picLocks noChangeAspect="1"/>
           </p:cNvPicPr>
@@ -15125,7 +15061,7 @@
       </p:pic>
       <p:sp>
         <p:nvSpPr>
-          <p:cNvPr id="31" name="Shape 27"/>
+          <p:cNvPr id="30" name="Shape 26"/>
           <p:cNvSpPr/>
           <p:nvPr/>
         </p:nvSpPr>
@@ -15147,6 +15083,48 @@
             <a:prstDash val="solid"/>
           </a:ln>
         </p:spPr>
+      </p:sp>
+      <p:sp>
+        <p:nvSpPr>
+          <p:cNvPr id="31" name="ocean:footer"/>
+          <p:cNvSpPr/>
+          <p:nvPr/>
+        </p:nvSpPr>
+        <p:spPr>
+          <a:xfrm>
+            <a:off x="548640" y="6419088"/>
+            <a:ext cx="7315200" cy="182880"/>
+          </a:xfrm>
+          <a:prstGeom prst="rect">
+            <a:avLst/>
+          </a:prstGeom>
+          <a:noFill/>
+          <a:ln/>
+        </p:spPr>
+        <p:txBody>
+          <a:bodyPr wrap="square" lIns="0" tIns="0" rIns="0" bIns="0" rtlCol="0" anchor="t"/>
+          <a:lstStyle/>
+          <a:p>
+            <a:pPr algn="l" indent="0" marL="0">
+              <a:lnSpc>
+                <a:spcPts val="1116"/>
+              </a:lnSpc>
+              <a:buNone/>
+            </a:pPr>
+            <a:r>
+              <a:rPr lang="en-US" sz="900" spc="225" kern="0" dirty="0">
+                <a:solidFill>
+                  <a:srgbClr val="1B4039"/>
+                </a:solidFill>
+                <a:latin typeface="Stack Sans Headline Light" pitchFamily="34" charset="0"/>
+                <a:ea typeface="Stack Sans Headline Light" pitchFamily="34" charset="-122"/>
+                <a:cs typeface="Stack Sans Headline Light" pitchFamily="34" charset="-120"/>
+              </a:rPr>
+              <a:t>OCEAN RCS · CONFIDENTIAL · DESIGN SPECIMEN · DO NOT USE</a:t>
+            </a:r>
+            <a:endParaRPr lang="en-US" sz="900" dirty="0"/>
+          </a:p>
+        </p:txBody>
       </p:sp>
     </p:spTree>
   </p:cSld>
@@ -16112,49 +16090,7 @@
       </p:sp>
       <p:sp>
         <p:nvSpPr>
-          <p:cNvPr id="29" name="ocean:footer"/>
-          <p:cNvSpPr/>
-          <p:nvPr/>
-        </p:nvSpPr>
-        <p:spPr>
-          <a:xfrm>
-            <a:off x="548640" y="6419088"/>
-            <a:ext cx="7315200" cy="182880"/>
-          </a:xfrm>
-          <a:prstGeom prst="rect">
-            <a:avLst/>
-          </a:prstGeom>
-          <a:noFill/>
-          <a:ln/>
-        </p:spPr>
-        <p:txBody>
-          <a:bodyPr wrap="square" lIns="0" tIns="0" rIns="0" bIns="0" rtlCol="0" anchor="t"/>
-          <a:lstStyle/>
-          <a:p>
-            <a:pPr algn="l" indent="0" marL="0">
-              <a:lnSpc>
-                <a:spcPts val="1116"/>
-              </a:lnSpc>
-              <a:buNone/>
-            </a:pPr>
-            <a:r>
-              <a:rPr lang="en-US" sz="900" spc="225" kern="0" dirty="0">
-                <a:solidFill>
-                  <a:srgbClr val="1B4039"/>
-                </a:solidFill>
-                <a:latin typeface="Stack Sans Headline Light" pitchFamily="34" charset="0"/>
-                <a:ea typeface="Stack Sans Headline Light" pitchFamily="34" charset="-122"/>
-                <a:cs typeface="Stack Sans Headline Light" pitchFamily="34" charset="-120"/>
-              </a:rPr>
-              <a:t>OCEAN RCS · DESIGN SPECIMEN · DO NOT USE</a:t>
-            </a:r>
-            <a:endParaRPr lang="en-US" sz="900" dirty="0"/>
-          </a:p>
-        </p:txBody>
-      </p:sp>
-      <p:sp>
-        <p:nvSpPr>
-          <p:cNvPr id="30" name="ocean:frame"/>
+          <p:cNvPr id="29" name="ocean:frame"/>
           <p:cNvSpPr/>
           <p:nvPr/>
         </p:nvSpPr>
@@ -16215,7 +16151,7 @@
       </p:sp>
       <p:sp>
         <p:nvSpPr>
-          <p:cNvPr id="31" name="Shape 28"/>
+          <p:cNvPr id="30" name="Shape 27"/>
           <p:cNvSpPr/>
           <p:nvPr/>
         </p:nvSpPr>
@@ -16240,7 +16176,7 @@
       </p:sp>
       <p:sp>
         <p:nvSpPr>
-          <p:cNvPr id="32" name="ocean:label"/>
+          <p:cNvPr id="31" name="ocean:label"/>
           <p:cNvSpPr/>
           <p:nvPr/>
         </p:nvSpPr>
@@ -16282,7 +16218,7 @@
       </p:sp>
       <p:sp>
         <p:nvSpPr>
-          <p:cNvPr id="33" name="ocean:section"/>
+          <p:cNvPr id="32" name="ocean:section"/>
           <p:cNvSpPr/>
           <p:nvPr/>
         </p:nvSpPr>
@@ -16324,7 +16260,7 @@
       </p:sp>
       <p:sp>
         <p:nvSpPr>
-          <p:cNvPr id="34" name="ocean:body"/>
+          <p:cNvPr id="33" name="ocean:body"/>
           <p:cNvSpPr/>
           <p:nvPr/>
         </p:nvSpPr>
@@ -16406,7 +16342,7 @@
       </p:sp>
       <p:sp>
         <p:nvSpPr>
-          <p:cNvPr id="35" name="ocean:frame"/>
+          <p:cNvPr id="34" name="ocean:frame"/>
           <p:cNvSpPr/>
           <p:nvPr/>
         </p:nvSpPr>
@@ -16467,7 +16403,7 @@
       </p:sp>
       <p:sp>
         <p:nvSpPr>
-          <p:cNvPr id="36" name="Shape 33"/>
+          <p:cNvPr id="35" name="Shape 32"/>
           <p:cNvSpPr/>
           <p:nvPr/>
         </p:nvSpPr>
@@ -16492,7 +16428,7 @@
       </p:sp>
       <p:sp>
         <p:nvSpPr>
-          <p:cNvPr id="37" name="Shape 34"/>
+          <p:cNvPr id="36" name="Shape 33"/>
           <p:cNvSpPr/>
           <p:nvPr/>
         </p:nvSpPr>
@@ -16517,7 +16453,7 @@
       </p:sp>
       <p:sp>
         <p:nvSpPr>
-          <p:cNvPr id="38" name="ocean:label"/>
+          <p:cNvPr id="37" name="ocean:label"/>
           <p:cNvSpPr/>
           <p:nvPr/>
         </p:nvSpPr>
@@ -16559,7 +16495,7 @@
       </p:sp>
       <p:sp>
         <p:nvSpPr>
-          <p:cNvPr id="39" name="ocean:section"/>
+          <p:cNvPr id="38" name="ocean:section"/>
           <p:cNvSpPr/>
           <p:nvPr/>
         </p:nvSpPr>
@@ -16601,7 +16537,7 @@
       </p:sp>
       <p:sp>
         <p:nvSpPr>
-          <p:cNvPr id="40" name="ocean:body"/>
+          <p:cNvPr id="39" name="ocean:body"/>
           <p:cNvSpPr/>
           <p:nvPr/>
         </p:nvSpPr>
@@ -16663,7 +16599,7 @@
       </p:sp>
       <p:sp>
         <p:nvSpPr>
-          <p:cNvPr id="41" name="ocean:frame"/>
+          <p:cNvPr id="40" name="ocean:frame"/>
           <p:cNvSpPr/>
           <p:nvPr/>
         </p:nvSpPr>
@@ -16724,7 +16660,7 @@
       </p:sp>
       <p:sp>
         <p:nvSpPr>
-          <p:cNvPr id="42" name="Shape 39"/>
+          <p:cNvPr id="41" name="Shape 38"/>
           <p:cNvSpPr/>
           <p:nvPr/>
         </p:nvSpPr>
@@ -16749,7 +16685,7 @@
       </p:sp>
       <p:sp>
         <p:nvSpPr>
-          <p:cNvPr id="43" name="Shape 40"/>
+          <p:cNvPr id="42" name="Shape 39"/>
           <p:cNvSpPr/>
           <p:nvPr/>
         </p:nvSpPr>
@@ -16774,7 +16710,7 @@
       </p:sp>
       <p:sp>
         <p:nvSpPr>
-          <p:cNvPr id="44" name="Shape 41"/>
+          <p:cNvPr id="43" name="Shape 40"/>
           <p:cNvSpPr/>
           <p:nvPr/>
         </p:nvSpPr>
@@ -16799,7 +16735,7 @@
       </p:sp>
       <p:sp>
         <p:nvSpPr>
-          <p:cNvPr id="45" name="ocean:label"/>
+          <p:cNvPr id="44" name="ocean:label"/>
           <p:cNvSpPr/>
           <p:nvPr/>
         </p:nvSpPr>
@@ -16841,7 +16777,7 @@
       </p:sp>
       <p:sp>
         <p:nvSpPr>
-          <p:cNvPr id="46" name="ocean:section"/>
+          <p:cNvPr id="45" name="ocean:section"/>
           <p:cNvSpPr/>
           <p:nvPr/>
         </p:nvSpPr>
@@ -16883,7 +16819,7 @@
       </p:sp>
       <p:sp>
         <p:nvSpPr>
-          <p:cNvPr id="47" name="ocean:body"/>
+          <p:cNvPr id="46" name="ocean:body"/>
           <p:cNvSpPr/>
           <p:nvPr/>
         </p:nvSpPr>
@@ -16940,6 +16876,48 @@
               <a:t>service, subject to utility approval.</a:t>
             </a:r>
             <a:endParaRPr lang="en-US" sz="1300" dirty="0"/>
+          </a:p>
+        </p:txBody>
+      </p:sp>
+      <p:sp>
+        <p:nvSpPr>
+          <p:cNvPr id="47" name="ocean:footer"/>
+          <p:cNvSpPr/>
+          <p:nvPr/>
+        </p:nvSpPr>
+        <p:spPr>
+          <a:xfrm>
+            <a:off x="548640" y="6419088"/>
+            <a:ext cx="7315200" cy="182880"/>
+          </a:xfrm>
+          <a:prstGeom prst="rect">
+            <a:avLst/>
+          </a:prstGeom>
+          <a:noFill/>
+          <a:ln/>
+        </p:spPr>
+        <p:txBody>
+          <a:bodyPr wrap="square" lIns="0" tIns="0" rIns="0" bIns="0" rtlCol="0" anchor="t"/>
+          <a:lstStyle/>
+          <a:p>
+            <a:pPr algn="l" indent="0" marL="0">
+              <a:lnSpc>
+                <a:spcPts val="1116"/>
+              </a:lnSpc>
+              <a:buNone/>
+            </a:pPr>
+            <a:r>
+              <a:rPr lang="en-US" sz="900" spc="225" kern="0" dirty="0">
+                <a:solidFill>
+                  <a:srgbClr val="1B4039"/>
+                </a:solidFill>
+                <a:latin typeface="Stack Sans Headline Light" pitchFamily="34" charset="0"/>
+                <a:ea typeface="Stack Sans Headline Light" pitchFamily="34" charset="-122"/>
+                <a:cs typeface="Stack Sans Headline Light" pitchFamily="34" charset="-120"/>
+              </a:rPr>
+              <a:t>OCEAN RCS · CONFIDENTIAL · DESIGN SPECIMEN · DO NOT USE</a:t>
+            </a:r>
+            <a:endParaRPr lang="en-US" sz="900" dirty="0"/>
           </a:p>
         </p:txBody>
       </p:sp>
@@ -17865,49 +17843,7 @@
       </p:sp>
       <p:sp>
         <p:nvSpPr>
-          <p:cNvPr id="28" name="ocean:footer"/>
-          <p:cNvSpPr/>
-          <p:nvPr/>
-        </p:nvSpPr>
-        <p:spPr>
-          <a:xfrm>
-            <a:off x="548640" y="6419088"/>
-            <a:ext cx="7315200" cy="182880"/>
-          </a:xfrm>
-          <a:prstGeom prst="rect">
-            <a:avLst/>
-          </a:prstGeom>
-          <a:noFill/>
-          <a:ln/>
-        </p:spPr>
-        <p:txBody>
-          <a:bodyPr wrap="square" lIns="0" tIns="0" rIns="0" bIns="0" rtlCol="0" anchor="t"/>
-          <a:lstStyle/>
-          <a:p>
-            <a:pPr algn="l" indent="0" marL="0">
-              <a:lnSpc>
-                <a:spcPts val="1116"/>
-              </a:lnSpc>
-              <a:buNone/>
-            </a:pPr>
-            <a:r>
-              <a:rPr lang="en-US" sz="900" spc="225" kern="0" dirty="0">
-                <a:solidFill>
-                  <a:srgbClr val="1B4039"/>
-                </a:solidFill>
-                <a:latin typeface="Stack Sans Headline Light" pitchFamily="34" charset="0"/>
-                <a:ea typeface="Stack Sans Headline Light" pitchFamily="34" charset="-122"/>
-                <a:cs typeface="Stack Sans Headline Light" pitchFamily="34" charset="-120"/>
-              </a:rPr>
-              <a:t>OCEAN RCS · DESIGN SPECIMEN · DO NOT USE</a:t>
-            </a:r>
-            <a:endParaRPr lang="en-US" sz="900" dirty="0"/>
-          </a:p>
-        </p:txBody>
-      </p:sp>
-      <p:sp>
-        <p:nvSpPr>
-          <p:cNvPr id="29" name="Shape 26"/>
+          <p:cNvPr id="28" name="Shape 25"/>
           <p:cNvSpPr/>
           <p:nvPr/>
         </p:nvSpPr>
@@ -17930,7 +17866,7 @@
       </p:sp>
       <p:sp>
         <p:nvSpPr>
-          <p:cNvPr id="30" name="Shape 27"/>
+          <p:cNvPr id="29" name="Shape 26"/>
           <p:cNvSpPr/>
           <p:nvPr/>
         </p:nvSpPr>
@@ -17955,7 +17891,7 @@
       </p:sp>
       <p:sp>
         <p:nvSpPr>
-          <p:cNvPr id="31" name="ocean:label"/>
+          <p:cNvPr id="30" name="ocean:label"/>
           <p:cNvSpPr/>
           <p:nvPr/>
         </p:nvSpPr>
@@ -17997,7 +17933,7 @@
       </p:sp>
       <p:sp>
         <p:nvSpPr>
-          <p:cNvPr id="32" name="ocean:section"/>
+          <p:cNvPr id="31" name="ocean:section"/>
           <p:cNvSpPr/>
           <p:nvPr/>
         </p:nvSpPr>
@@ -18039,7 +17975,7 @@
       </p:sp>
       <p:sp>
         <p:nvSpPr>
-          <p:cNvPr id="33" name="ocean:body"/>
+          <p:cNvPr id="32" name="ocean:body"/>
           <p:cNvSpPr/>
           <p:nvPr/>
         </p:nvSpPr>
@@ -18101,7 +18037,7 @@
       </p:sp>
       <p:sp>
         <p:nvSpPr>
-          <p:cNvPr id="34" name="Shape 31"/>
+          <p:cNvPr id="33" name="Shape 30"/>
           <p:cNvSpPr/>
           <p:nvPr/>
         </p:nvSpPr>
@@ -18126,7 +18062,7 @@
       </p:sp>
       <p:sp>
         <p:nvSpPr>
-          <p:cNvPr id="35" name="ocean:label"/>
+          <p:cNvPr id="34" name="ocean:label"/>
           <p:cNvSpPr/>
           <p:nvPr/>
         </p:nvSpPr>
@@ -18168,7 +18104,7 @@
       </p:sp>
       <p:sp>
         <p:nvSpPr>
-          <p:cNvPr id="36" name="ocean:section"/>
+          <p:cNvPr id="35" name="ocean:section"/>
           <p:cNvSpPr/>
           <p:nvPr/>
         </p:nvSpPr>
@@ -18210,7 +18146,7 @@
       </p:sp>
       <p:sp>
         <p:nvSpPr>
-          <p:cNvPr id="37" name="ocean:body"/>
+          <p:cNvPr id="36" name="ocean:body"/>
           <p:cNvSpPr/>
           <p:nvPr/>
         </p:nvSpPr>
@@ -18272,7 +18208,7 @@
       </p:sp>
       <p:sp>
         <p:nvSpPr>
-          <p:cNvPr id="38" name="Shape 35"/>
+          <p:cNvPr id="37" name="Shape 34"/>
           <p:cNvSpPr/>
           <p:nvPr/>
         </p:nvSpPr>
@@ -18297,7 +18233,7 @@
       </p:sp>
       <p:sp>
         <p:nvSpPr>
-          <p:cNvPr id="39" name="ocean:label"/>
+          <p:cNvPr id="38" name="ocean:label"/>
           <p:cNvSpPr/>
           <p:nvPr/>
         </p:nvSpPr>
@@ -18339,7 +18275,7 @@
       </p:sp>
       <p:sp>
         <p:nvSpPr>
-          <p:cNvPr id="40" name="ocean:section"/>
+          <p:cNvPr id="39" name="ocean:section"/>
           <p:cNvSpPr/>
           <p:nvPr/>
         </p:nvSpPr>
@@ -18381,7 +18317,7 @@
       </p:sp>
       <p:sp>
         <p:nvSpPr>
-          <p:cNvPr id="41" name="ocean:body"/>
+          <p:cNvPr id="40" name="ocean:body"/>
           <p:cNvSpPr/>
           <p:nvPr/>
         </p:nvSpPr>
@@ -18443,7 +18379,7 @@
       </p:sp>
       <p:sp>
         <p:nvSpPr>
-          <p:cNvPr id="42" name="Shape 39"/>
+          <p:cNvPr id="41" name="Shape 38"/>
           <p:cNvSpPr/>
           <p:nvPr/>
         </p:nvSpPr>
@@ -18468,7 +18404,7 @@
       </p:sp>
       <p:sp>
         <p:nvSpPr>
-          <p:cNvPr id="43" name="ocean:label"/>
+          <p:cNvPr id="42" name="ocean:label"/>
           <p:cNvSpPr/>
           <p:nvPr/>
         </p:nvSpPr>
@@ -18510,7 +18446,7 @@
       </p:sp>
       <p:sp>
         <p:nvSpPr>
-          <p:cNvPr id="44" name="ocean:section"/>
+          <p:cNvPr id="43" name="ocean:section"/>
           <p:cNvSpPr/>
           <p:nvPr/>
         </p:nvSpPr>
@@ -18552,7 +18488,7 @@
       </p:sp>
       <p:sp>
         <p:nvSpPr>
-          <p:cNvPr id="45" name="ocean:body"/>
+          <p:cNvPr id="44" name="ocean:body"/>
           <p:cNvSpPr/>
           <p:nvPr/>
         </p:nvSpPr>
@@ -18609,6 +18545,48 @@
               <a:t>support.</a:t>
             </a:r>
             <a:endParaRPr lang="en-US" sz="1300" dirty="0"/>
+          </a:p>
+        </p:txBody>
+      </p:sp>
+      <p:sp>
+        <p:nvSpPr>
+          <p:cNvPr id="45" name="ocean:footer"/>
+          <p:cNvSpPr/>
+          <p:nvPr/>
+        </p:nvSpPr>
+        <p:spPr>
+          <a:xfrm>
+            <a:off x="548640" y="6419088"/>
+            <a:ext cx="7315200" cy="182880"/>
+          </a:xfrm>
+          <a:prstGeom prst="rect">
+            <a:avLst/>
+          </a:prstGeom>
+          <a:noFill/>
+          <a:ln/>
+        </p:spPr>
+        <p:txBody>
+          <a:bodyPr wrap="square" lIns="0" tIns="0" rIns="0" bIns="0" rtlCol="0" anchor="t"/>
+          <a:lstStyle/>
+          <a:p>
+            <a:pPr algn="l" indent="0" marL="0">
+              <a:lnSpc>
+                <a:spcPts val="1116"/>
+              </a:lnSpc>
+              <a:buNone/>
+            </a:pPr>
+            <a:r>
+              <a:rPr lang="en-US" sz="900" spc="225" kern="0" dirty="0">
+                <a:solidFill>
+                  <a:srgbClr val="1B4039"/>
+                </a:solidFill>
+                <a:latin typeface="Stack Sans Headline Light" pitchFamily="34" charset="0"/>
+                <a:ea typeface="Stack Sans Headline Light" pitchFamily="34" charset="-122"/>
+                <a:cs typeface="Stack Sans Headline Light" pitchFamily="34" charset="-120"/>
+              </a:rPr>
+              <a:t>OCEAN RCS · CONFIDENTIAL · DESIGN SPECIMEN · DO NOT USE</a:t>
+            </a:r>
+            <a:endParaRPr lang="en-US" sz="900" dirty="0"/>
           </a:p>
         </p:txBody>
       </p:sp>

--- a/output/pptx/ocean-layout-reference.pptx
+++ b/output/pptx/ocean-layout-reference.pptx
@@ -3354,6 +3354,48 @@
               <a:t>SAVINGS, INCENTIVES AND PAYBACK ON VERIFIED INPUTS.</a:t>
             </a:r>
             <a:endParaRPr lang="en-US" sz="1100" dirty="0"/>
+          </a:p>
+        </p:txBody>
+      </p:sp>
+      <p:sp>
+        <p:nvSpPr>
+          <p:cNvPr id="7" name="ocean:footer"/>
+          <p:cNvSpPr/>
+          <p:nvPr/>
+        </p:nvSpPr>
+        <p:spPr>
+          <a:xfrm>
+            <a:off x="548640" y="6419088"/>
+            <a:ext cx="7315200" cy="182880"/>
+          </a:xfrm>
+          <a:prstGeom prst="rect">
+            <a:avLst/>
+          </a:prstGeom>
+          <a:noFill/>
+          <a:ln/>
+        </p:spPr>
+        <p:txBody>
+          <a:bodyPr wrap="square" lIns="0" tIns="0" rIns="0" bIns="0" rtlCol="0" anchor="t"/>
+          <a:lstStyle/>
+          <a:p>
+            <a:pPr algn="l" indent="0" marL="0">
+              <a:lnSpc>
+                <a:spcPts val="1116"/>
+              </a:lnSpc>
+              <a:buNone/>
+            </a:pPr>
+            <a:r>
+              <a:rPr lang="en-US" sz="900" spc="225" kern="0" dirty="0">
+                <a:solidFill>
+                  <a:srgbClr val="F3FBF8"/>
+                </a:solidFill>
+                <a:latin typeface="Stack Sans Headline Light" pitchFamily="34" charset="0"/>
+                <a:ea typeface="Stack Sans Headline Light" pitchFamily="34" charset="-122"/>
+                <a:cs typeface="Stack Sans Headline Light" pitchFamily="34" charset="-120"/>
+              </a:rPr>
+              <a:t>OCEAN RCS · CONFIDENTIAL · DESIGN SPECIMEN · DO NOT USE</a:t>
+            </a:r>
+            <a:endParaRPr lang="en-US" sz="900" dirty="0"/>
           </a:p>
         </p:txBody>
       </p:sp>
@@ -6867,6 +6909,48 @@
           </a:p>
         </p:txBody>
       </p:sp>
+      <p:sp>
+        <p:nvSpPr>
+          <p:cNvPr id="12" name="ocean:footer"/>
+          <p:cNvSpPr/>
+          <p:nvPr/>
+        </p:nvSpPr>
+        <p:spPr>
+          <a:xfrm>
+            <a:off x="548640" y="6419088"/>
+            <a:ext cx="7315200" cy="182880"/>
+          </a:xfrm>
+          <a:prstGeom prst="rect">
+            <a:avLst/>
+          </a:prstGeom>
+          <a:noFill/>
+          <a:ln/>
+        </p:spPr>
+        <p:txBody>
+          <a:bodyPr wrap="square" lIns="0" tIns="0" rIns="0" bIns="0" rtlCol="0" anchor="t"/>
+          <a:lstStyle/>
+          <a:p>
+            <a:pPr algn="l" indent="0" marL="0">
+              <a:lnSpc>
+                <a:spcPts val="1116"/>
+              </a:lnSpc>
+              <a:buNone/>
+            </a:pPr>
+            <a:r>
+              <a:rPr lang="en-US" sz="900" spc="225" kern="0" dirty="0">
+                <a:solidFill>
+                  <a:srgbClr val="F3FBF8"/>
+                </a:solidFill>
+                <a:latin typeface="Stack Sans Headline Light" pitchFamily="34" charset="0"/>
+                <a:ea typeface="Stack Sans Headline Light" pitchFamily="34" charset="-122"/>
+                <a:cs typeface="Stack Sans Headline Light" pitchFamily="34" charset="-120"/>
+              </a:rPr>
+              <a:t>OCEAN RCS · CONFIDENTIAL · DESIGN SPECIMEN · DO NOT USE</a:t>
+            </a:r>
+            <a:endParaRPr lang="en-US" sz="900" dirty="0"/>
+          </a:p>
+        </p:txBody>
+      </p:sp>
     </p:spTree>
   </p:cSld>
   <p:clrMapOvr>
@@ -9006,26 +9090,26 @@
         <p:spPr>
           <a:xfrm>
             <a:off x="512064" y="3026664"/>
-            <a:ext cx="2743200" cy="816737"/>
-          </a:xfrm>
-          <a:prstGeom prst="rect">
-            <a:avLst/>
-          </a:prstGeom>
-          <a:noFill/>
-          <a:ln/>
-        </p:spPr>
-        <p:txBody>
-          <a:bodyPr wrap="square" lIns="0" tIns="0" rIns="0" bIns="0" rtlCol="0" anchor="t"/>
-          <a:lstStyle/>
-          <a:p>
-            <a:pPr algn="l" indent="0" marL="0">
-              <a:lnSpc>
-                <a:spcPts val="6034"/>
-              </a:lnSpc>
-              <a:buNone/>
-            </a:pPr>
-            <a:r>
-              <a:rPr lang="en-US" sz="5839" spc="-350" kern="0" dirty="0">
+            <a:ext cx="2743200" cy="729425"/>
+          </a:xfrm>
+          <a:prstGeom prst="rect">
+            <a:avLst/>
+          </a:prstGeom>
+          <a:noFill/>
+          <a:ln/>
+        </p:spPr>
+        <p:txBody>
+          <a:bodyPr wrap="square" lIns="0" tIns="0" rIns="0" bIns="0" rtlCol="0" anchor="t"/>
+          <a:lstStyle/>
+          <a:p>
+            <a:pPr algn="l" indent="0" marL="0">
+              <a:lnSpc>
+                <a:spcPts val="5442"/>
+              </a:lnSpc>
+              <a:buNone/>
+            </a:pPr>
+            <a:r>
+              <a:rPr lang="en-US" sz="5266" spc="-316" kern="0" dirty="0">
                 <a:solidFill>
                   <a:srgbClr val="0B1617"/>
                 </a:solidFill>
@@ -9035,7 +9119,7 @@
               </a:rPr>
               <a:t>01</a:t>
             </a:r>
-            <a:endParaRPr lang="en-US" sz="5839" dirty="0"/>
+            <a:endParaRPr lang="en-US" sz="5266" dirty="0"/>
           </a:p>
         </p:txBody>
       </p:sp>
@@ -9090,7 +9174,7 @@
         <p:spPr>
           <a:xfrm>
             <a:off x="4425696" y="3364992"/>
-            <a:ext cx="7223760" cy="469265"/>
+            <a:ext cx="7223760" cy="433832"/>
           </a:xfrm>
           <a:prstGeom prst="rect">
             <a:avLst/>
@@ -9131,7 +9215,7 @@
         </p:nvSpPr>
         <p:spPr>
           <a:xfrm>
-            <a:off x="548640" y="3870833"/>
+            <a:off x="548640" y="3783521"/>
             <a:ext cx="11094415" cy="0"/>
           </a:xfrm>
           <a:prstGeom prst="line">
@@ -9154,27 +9238,27 @@
         </p:nvSpPr>
         <p:spPr>
           <a:xfrm>
-            <a:off x="512064" y="3916553"/>
-            <a:ext cx="2743200" cy="816737"/>
-          </a:xfrm>
-          <a:prstGeom prst="rect">
-            <a:avLst/>
-          </a:prstGeom>
-          <a:noFill/>
-          <a:ln/>
-        </p:spPr>
-        <p:txBody>
-          <a:bodyPr wrap="square" lIns="0" tIns="0" rIns="0" bIns="0" rtlCol="0" anchor="t"/>
-          <a:lstStyle/>
-          <a:p>
-            <a:pPr algn="l" indent="0" marL="0">
-              <a:lnSpc>
-                <a:spcPts val="6034"/>
-              </a:lnSpc>
-              <a:buNone/>
-            </a:pPr>
-            <a:r>
-              <a:rPr lang="en-US" sz="5839" spc="-350" kern="0" dirty="0">
+            <a:off x="512064" y="3829241"/>
+            <a:ext cx="2743200" cy="729425"/>
+          </a:xfrm>
+          <a:prstGeom prst="rect">
+            <a:avLst/>
+          </a:prstGeom>
+          <a:noFill/>
+          <a:ln/>
+        </p:spPr>
+        <p:txBody>
+          <a:bodyPr wrap="square" lIns="0" tIns="0" rIns="0" bIns="0" rtlCol="0" anchor="t"/>
+          <a:lstStyle/>
+          <a:p>
+            <a:pPr algn="l" indent="0" marL="0">
+              <a:lnSpc>
+                <a:spcPts val="5442"/>
+              </a:lnSpc>
+              <a:buNone/>
+            </a:pPr>
+            <a:r>
+              <a:rPr lang="en-US" sz="5266" spc="-316" kern="0" dirty="0">
                 <a:solidFill>
                   <a:srgbClr val="0B1617"/>
                 </a:solidFill>
@@ -9184,7 +9268,7 @@
               </a:rPr>
               <a:t>02</a:t>
             </a:r>
-            <a:endParaRPr lang="en-US" sz="5839" dirty="0"/>
+            <a:endParaRPr lang="en-US" sz="5266" dirty="0"/>
           </a:p>
         </p:txBody>
       </p:sp>
@@ -9196,7 +9280,7 @@
         </p:nvSpPr>
         <p:spPr>
           <a:xfrm>
-            <a:off x="4443984" y="4053713"/>
+            <a:off x="4443984" y="3966401"/>
             <a:ext cx="7132320" cy="200660"/>
           </a:xfrm>
           <a:prstGeom prst="rect">
@@ -9238,8 +9322,8 @@
         </p:nvSpPr>
         <p:spPr>
           <a:xfrm>
-            <a:off x="4425696" y="4254881"/>
-            <a:ext cx="7223760" cy="469265"/>
+            <a:off x="4425696" y="4167569"/>
+            <a:ext cx="7223760" cy="433832"/>
           </a:xfrm>
           <a:prstGeom prst="rect">
             <a:avLst/>
@@ -9280,7 +9364,7 @@
         </p:nvSpPr>
         <p:spPr>
           <a:xfrm>
-            <a:off x="548640" y="4760722"/>
+            <a:off x="548640" y="4586097"/>
             <a:ext cx="11094415" cy="0"/>
           </a:xfrm>
           <a:prstGeom prst="line">
@@ -9303,27 +9387,27 @@
         </p:nvSpPr>
         <p:spPr>
           <a:xfrm>
-            <a:off x="512064" y="4806442"/>
-            <a:ext cx="2743200" cy="816737"/>
-          </a:xfrm>
-          <a:prstGeom prst="rect">
-            <a:avLst/>
-          </a:prstGeom>
-          <a:noFill/>
-          <a:ln/>
-        </p:spPr>
-        <p:txBody>
-          <a:bodyPr wrap="square" lIns="0" tIns="0" rIns="0" bIns="0" rtlCol="0" anchor="t"/>
-          <a:lstStyle/>
-          <a:p>
-            <a:pPr algn="l" indent="0" marL="0">
-              <a:lnSpc>
-                <a:spcPts val="6034"/>
-              </a:lnSpc>
-              <a:buNone/>
-            </a:pPr>
-            <a:r>
-              <a:rPr lang="en-US" sz="5839" spc="-350" kern="0" dirty="0">
+            <a:off x="512064" y="4631817"/>
+            <a:ext cx="2743200" cy="729425"/>
+          </a:xfrm>
+          <a:prstGeom prst="rect">
+            <a:avLst/>
+          </a:prstGeom>
+          <a:noFill/>
+          <a:ln/>
+        </p:spPr>
+        <p:txBody>
+          <a:bodyPr wrap="square" lIns="0" tIns="0" rIns="0" bIns="0" rtlCol="0" anchor="t"/>
+          <a:lstStyle/>
+          <a:p>
+            <a:pPr algn="l" indent="0" marL="0">
+              <a:lnSpc>
+                <a:spcPts val="5442"/>
+              </a:lnSpc>
+              <a:buNone/>
+            </a:pPr>
+            <a:r>
+              <a:rPr lang="en-US" sz="5266" spc="-316" kern="0" dirty="0">
                 <a:solidFill>
                   <a:srgbClr val="0B1617"/>
                 </a:solidFill>
@@ -9333,7 +9417,7 @@
               </a:rPr>
               <a:t>03</a:t>
             </a:r>
-            <a:endParaRPr lang="en-US" sz="5839" dirty="0"/>
+            <a:endParaRPr lang="en-US" sz="5266" dirty="0"/>
           </a:p>
         </p:txBody>
       </p:sp>
@@ -9345,7 +9429,7 @@
         </p:nvSpPr>
         <p:spPr>
           <a:xfrm>
-            <a:off x="4443984" y="4943602"/>
+            <a:off x="4443984" y="4768977"/>
             <a:ext cx="7132320" cy="200660"/>
           </a:xfrm>
           <a:prstGeom prst="rect">
@@ -9387,8 +9471,8 @@
         </p:nvSpPr>
         <p:spPr>
           <a:xfrm>
-            <a:off x="4425696" y="5144770"/>
-            <a:ext cx="7223760" cy="469265"/>
+            <a:off x="4425696" y="4970145"/>
+            <a:ext cx="7223760" cy="433832"/>
           </a:xfrm>
           <a:prstGeom prst="rect">
             <a:avLst/>
@@ -9429,7 +9513,7 @@
         </p:nvSpPr>
         <p:spPr>
           <a:xfrm>
-            <a:off x="548640" y="5650611"/>
+            <a:off x="548640" y="5388674"/>
             <a:ext cx="11094415" cy="0"/>
           </a:xfrm>
           <a:prstGeom prst="line">
@@ -9452,27 +9536,27 @@
         </p:nvSpPr>
         <p:spPr>
           <a:xfrm>
-            <a:off x="512064" y="5696331"/>
-            <a:ext cx="2743200" cy="816737"/>
-          </a:xfrm>
-          <a:prstGeom prst="rect">
-            <a:avLst/>
-          </a:prstGeom>
-          <a:noFill/>
-          <a:ln/>
-        </p:spPr>
-        <p:txBody>
-          <a:bodyPr wrap="square" lIns="0" tIns="0" rIns="0" bIns="0" rtlCol="0" anchor="t"/>
-          <a:lstStyle/>
-          <a:p>
-            <a:pPr algn="l" indent="0" marL="0">
-              <a:lnSpc>
-                <a:spcPts val="6034"/>
-              </a:lnSpc>
-              <a:buNone/>
-            </a:pPr>
-            <a:r>
-              <a:rPr lang="en-US" sz="5839" spc="-350" kern="0" dirty="0">
+            <a:off x="512064" y="5434393"/>
+            <a:ext cx="2743200" cy="729425"/>
+          </a:xfrm>
+          <a:prstGeom prst="rect">
+            <a:avLst/>
+          </a:prstGeom>
+          <a:noFill/>
+          <a:ln/>
+        </p:spPr>
+        <p:txBody>
+          <a:bodyPr wrap="square" lIns="0" tIns="0" rIns="0" bIns="0" rtlCol="0" anchor="t"/>
+          <a:lstStyle/>
+          <a:p>
+            <a:pPr algn="l" indent="0" marL="0">
+              <a:lnSpc>
+                <a:spcPts val="5442"/>
+              </a:lnSpc>
+              <a:buNone/>
+            </a:pPr>
+            <a:r>
+              <a:rPr lang="en-US" sz="5266" spc="-316" kern="0" dirty="0">
                 <a:solidFill>
                   <a:srgbClr val="0B1617"/>
                 </a:solidFill>
@@ -9482,7 +9566,7 @@
               </a:rPr>
               <a:t>04</a:t>
             </a:r>
-            <a:endParaRPr lang="en-US" sz="5839" dirty="0"/>
+            <a:endParaRPr lang="en-US" sz="5266" dirty="0"/>
           </a:p>
         </p:txBody>
       </p:sp>
@@ -9494,7 +9578,7 @@
         </p:nvSpPr>
         <p:spPr>
           <a:xfrm>
-            <a:off x="4443984" y="5833491"/>
+            <a:off x="4443984" y="5571554"/>
             <a:ext cx="7132320" cy="200660"/>
           </a:xfrm>
           <a:prstGeom prst="rect">
@@ -9536,8 +9620,8 @@
         </p:nvSpPr>
         <p:spPr>
           <a:xfrm>
-            <a:off x="4425696" y="6034659"/>
-            <a:ext cx="7223760" cy="469265"/>
+            <a:off x="4425696" y="5772721"/>
+            <a:ext cx="7223760" cy="433832"/>
           </a:xfrm>
           <a:prstGeom prst="rect">
             <a:avLst/>
@@ -9578,7 +9662,7 @@
         </p:nvSpPr>
         <p:spPr>
           <a:xfrm>
-            <a:off x="548640" y="6540500"/>
+            <a:off x="548640" y="6191250"/>
             <a:ext cx="11094415" cy="0"/>
           </a:xfrm>
           <a:prstGeom prst="line">
@@ -9601,7 +9685,7 @@
         </p:nvSpPr>
         <p:spPr>
           <a:xfrm>
-            <a:off x="548640" y="6591300"/>
+            <a:off x="548640" y="6242050"/>
             <a:ext cx="11094415" cy="38100"/>
           </a:xfrm>
           <a:prstGeom prst="rect">
@@ -9617,6 +9701,48 @@
             <a:prstDash val="solid"/>
           </a:ln>
         </p:spPr>
+      </p:sp>
+      <p:sp>
+        <p:nvSpPr>
+          <p:cNvPr id="24" name="ocean:footer"/>
+          <p:cNvSpPr/>
+          <p:nvPr/>
+        </p:nvSpPr>
+        <p:spPr>
+          <a:xfrm>
+            <a:off x="548640" y="6419088"/>
+            <a:ext cx="7315200" cy="182880"/>
+          </a:xfrm>
+          <a:prstGeom prst="rect">
+            <a:avLst/>
+          </a:prstGeom>
+          <a:noFill/>
+          <a:ln/>
+        </p:spPr>
+        <p:txBody>
+          <a:bodyPr wrap="square" lIns="0" tIns="0" rIns="0" bIns="0" rtlCol="0" anchor="t"/>
+          <a:lstStyle/>
+          <a:p>
+            <a:pPr algn="l" indent="0" marL="0">
+              <a:lnSpc>
+                <a:spcPts val="1116"/>
+              </a:lnSpc>
+              <a:buNone/>
+            </a:pPr>
+            <a:r>
+              <a:rPr lang="en-US" sz="900" spc="225" kern="0" dirty="0">
+                <a:solidFill>
+                  <a:srgbClr val="0B1617"/>
+                </a:solidFill>
+                <a:latin typeface="Stack Sans Headline Light" pitchFamily="34" charset="0"/>
+                <a:ea typeface="Stack Sans Headline Light" pitchFamily="34" charset="-122"/>
+                <a:cs typeface="Stack Sans Headline Light" pitchFamily="34" charset="-120"/>
+              </a:rPr>
+              <a:t>OCEAN RCS · CONFIDENTIAL · DESIGN SPECIMEN · DO NOT USE</a:t>
+            </a:r>
+            <a:endParaRPr lang="en-US" sz="900" dirty="0"/>
+          </a:p>
+        </p:txBody>
       </p:sp>
     </p:spTree>
   </p:cSld>
@@ -9821,6 +9947,48 @@
               <a:t>ROOF, STRUCTURE, SERVICE AND THE CONSTRAINTS THAT SHAPE THE ARRAY.</a:t>
             </a:r>
             <a:endParaRPr lang="en-US" sz="1100" dirty="0"/>
+          </a:p>
+        </p:txBody>
+      </p:sp>
+      <p:sp>
+        <p:nvSpPr>
+          <p:cNvPr id="7" name="ocean:footer"/>
+          <p:cNvSpPr/>
+          <p:nvPr/>
+        </p:nvSpPr>
+        <p:spPr>
+          <a:xfrm>
+            <a:off x="548640" y="6419088"/>
+            <a:ext cx="7315200" cy="182880"/>
+          </a:xfrm>
+          <a:prstGeom prst="rect">
+            <a:avLst/>
+          </a:prstGeom>
+          <a:noFill/>
+          <a:ln/>
+        </p:spPr>
+        <p:txBody>
+          <a:bodyPr wrap="square" lIns="0" tIns="0" rIns="0" bIns="0" rtlCol="0" anchor="t"/>
+          <a:lstStyle/>
+          <a:p>
+            <a:pPr algn="l" indent="0" marL="0">
+              <a:lnSpc>
+                <a:spcPts val="1116"/>
+              </a:lnSpc>
+              <a:buNone/>
+            </a:pPr>
+            <a:r>
+              <a:rPr lang="en-US" sz="900" spc="225" kern="0" dirty="0">
+                <a:solidFill>
+                  <a:srgbClr val="F3FBF8"/>
+                </a:solidFill>
+                <a:latin typeface="Stack Sans Headline Light" pitchFamily="34" charset="0"/>
+                <a:ea typeface="Stack Sans Headline Light" pitchFamily="34" charset="-122"/>
+                <a:cs typeface="Stack Sans Headline Light" pitchFamily="34" charset="-120"/>
+              </a:rPr>
+              <a:t>OCEAN RCS · CONFIDENTIAL · DESIGN SPECIMEN · DO NOT USE</a:t>
+            </a:r>
+            <a:endParaRPr lang="en-US" sz="900" dirty="0"/>
           </a:p>
         </p:txBody>
       </p:sp>
@@ -13905,6 +14073,48 @@
               <a:t>A system built for the building</a:t>
             </a:r>
             <a:endParaRPr lang="en-US" sz="4400" dirty="0"/>
+          </a:p>
+        </p:txBody>
+      </p:sp>
+      <p:sp>
+        <p:nvSpPr>
+          <p:cNvPr id="7" name="ocean:footer"/>
+          <p:cNvSpPr/>
+          <p:nvPr/>
+        </p:nvSpPr>
+        <p:spPr>
+          <a:xfrm>
+            <a:off x="548640" y="6419088"/>
+            <a:ext cx="7315200" cy="182880"/>
+          </a:xfrm>
+          <a:prstGeom prst="rect">
+            <a:avLst/>
+          </a:prstGeom>
+          <a:noFill/>
+          <a:ln/>
+        </p:spPr>
+        <p:txBody>
+          <a:bodyPr wrap="square" lIns="0" tIns="0" rIns="0" bIns="0" rtlCol="0" anchor="t"/>
+          <a:lstStyle/>
+          <a:p>
+            <a:pPr algn="l" indent="0" marL="0">
+              <a:lnSpc>
+                <a:spcPts val="1116"/>
+              </a:lnSpc>
+              <a:buNone/>
+            </a:pPr>
+            <a:r>
+              <a:rPr lang="en-US" sz="900" spc="225" kern="0" dirty="0">
+                <a:solidFill>
+                  <a:srgbClr val="0B1617"/>
+                </a:solidFill>
+                <a:latin typeface="Stack Sans Headline Light" pitchFamily="34" charset="0"/>
+                <a:ea typeface="Stack Sans Headline Light" pitchFamily="34" charset="-122"/>
+                <a:cs typeface="Stack Sans Headline Light" pitchFamily="34" charset="-120"/>
+              </a:rPr>
+              <a:t>OCEAN RCS · CONFIDENTIAL · DESIGN SPECIMEN · DO NOT USE</a:t>
+            </a:r>
+            <a:endParaRPr lang="en-US" sz="900" dirty="0"/>
           </a:p>
         </p:txBody>
       </p:sp>

--- a/output/pptx/ocean-layout-reference.pptx
+++ b/output/pptx/ocean-layout-reference.pptx
@@ -2718,7 +2718,7 @@
         </p:nvSpPr>
         <p:spPr>
           <a:xfrm>
-            <a:off x="711200" y="3017520"/>
+            <a:off x="711200" y="2761488"/>
             <a:ext cx="10769295" cy="228600"/>
           </a:xfrm>
           <a:prstGeom prst="rect">
